--- a/attach/UWM/UWM_PH702_2026Fall_Part05.pptx
+++ b/attach/UWM/UWM_PH702_2026Fall_Part05.pptx
@@ -204,7 +204,7 @@
 <file path=ppt/revisionInfo.xml><?xml version="1.0" encoding="utf-8"?>
 <p1510:revInfo xmlns:a="http://schemas.openxmlformats.org/drawingml/2006/main" xmlns:r="http://schemas.openxmlformats.org/officeDocument/2006/relationships" xmlns:p1510="http://schemas.microsoft.com/office/powerpoint/2015/10/main">
   <p1510:revLst>
-    <p1510:client id="{07A54B28-0879-43FF-ABE2-91983A7A4D4D}" v="3145" dt="2026-10-10T04:09:26.931"/>
+    <p1510:client id="{07A54B28-0879-43FF-ABE2-91983A7A4D4D}" v="139" dt="2026-10-16T02:35:09.906"/>
   </p1510:revLst>
 </p1510:revInfo>
 </file>
@@ -214,10 +214,25 @@
   <pc:docChgLst>
     <pc:chgData name="Zhiyang Zhou" userId="715b216a-9552-4d73-a9aa-1ef002111b6f" providerId="ADAL" clId="{2B661EA1-28DD-4C7A-9BAA-1E2E41397E83}"/>
     <pc:docChg chg="undo custSel addSld delSld modSld sldOrd">
-      <pc:chgData name="Zhiyang Zhou" userId="715b216a-9552-4d73-a9aa-1ef002111b6f" providerId="ADAL" clId="{2B661EA1-28DD-4C7A-9BAA-1E2E41397E83}" dt="2026-10-10T04:09:26.931" v="5067"/>
+      <pc:chgData name="Zhiyang Zhou" userId="715b216a-9552-4d73-a9aa-1ef002111b6f" providerId="ADAL" clId="{2B661EA1-28DD-4C7A-9BAA-1E2E41397E83}" dt="2026-10-16T02:35:09.905" v="5354" actId="1076"/>
       <pc:docMkLst>
         <pc:docMk/>
       </pc:docMkLst>
+      <pc:sldChg chg="modSp mod">
+        <pc:chgData name="Zhiyang Zhou" userId="715b216a-9552-4d73-a9aa-1ef002111b6f" providerId="ADAL" clId="{2B661EA1-28DD-4C7A-9BAA-1E2E41397E83}" dt="2026-10-16T02:14:27.605" v="5167" actId="20577"/>
+        <pc:sldMkLst>
+          <pc:docMk/>
+          <pc:sldMk cId="0" sldId="258"/>
+        </pc:sldMkLst>
+        <pc:spChg chg="mod">
+          <ac:chgData name="Zhiyang Zhou" userId="715b216a-9552-4d73-a9aa-1ef002111b6f" providerId="ADAL" clId="{2B661EA1-28DD-4C7A-9BAA-1E2E41397E83}" dt="2026-10-16T02:14:27.605" v="5167" actId="20577"/>
+          <ac:spMkLst>
+            <pc:docMk/>
+            <pc:sldMk cId="0" sldId="258"/>
+            <ac:spMk id="36867" creationId="{00000000-0000-0000-0000-000000000000}"/>
+          </ac:spMkLst>
+        </pc:spChg>
+      </pc:sldChg>
       <pc:sldChg chg="ord">
         <pc:chgData name="Zhiyang Zhou" userId="715b216a-9552-4d73-a9aa-1ef002111b6f" providerId="ADAL" clId="{2B661EA1-28DD-4C7A-9BAA-1E2E41397E83}" dt="2026-10-07T23:49:40.402" v="3"/>
         <pc:sldMkLst>
@@ -226,13 +241,13 @@
         </pc:sldMkLst>
       </pc:sldChg>
       <pc:sldChg chg="addSp delSp modSp mod modAnim">
-        <pc:chgData name="Zhiyang Zhou" userId="715b216a-9552-4d73-a9aa-1ef002111b6f" providerId="ADAL" clId="{2B661EA1-28DD-4C7A-9BAA-1E2E41397E83}" dt="2026-10-08T02:16:10.725" v="1318" actId="20577"/>
+        <pc:chgData name="Zhiyang Zhou" userId="715b216a-9552-4d73-a9aa-1ef002111b6f" providerId="ADAL" clId="{2B661EA1-28DD-4C7A-9BAA-1E2E41397E83}" dt="2026-10-16T02:35:09.905" v="5354" actId="1076"/>
         <pc:sldMkLst>
           <pc:docMk/>
           <pc:sldMk cId="0" sldId="323"/>
         </pc:sldMkLst>
         <pc:spChg chg="add del mod topLvl">
-          <ac:chgData name="Zhiyang Zhou" userId="715b216a-9552-4d73-a9aa-1ef002111b6f" providerId="ADAL" clId="{2B661EA1-28DD-4C7A-9BAA-1E2E41397E83}" dt="2026-10-08T02:15:59.992" v="1315" actId="1076"/>
+          <ac:chgData name="Zhiyang Zhou" userId="715b216a-9552-4d73-a9aa-1ef002111b6f" providerId="ADAL" clId="{2B661EA1-28DD-4C7A-9BAA-1E2E41397E83}" dt="2026-10-16T02:29:36.474" v="5231" actId="1036"/>
           <ac:spMkLst>
             <pc:docMk/>
             <pc:sldMk cId="0" sldId="323"/>
@@ -240,15 +255,23 @@
           </ac:spMkLst>
         </pc:spChg>
         <pc:spChg chg="mod">
-          <ac:chgData name="Zhiyang Zhou" userId="715b216a-9552-4d73-a9aa-1ef002111b6f" providerId="ADAL" clId="{2B661EA1-28DD-4C7A-9BAA-1E2E41397E83}" dt="2026-10-08T02:16:10.725" v="1318" actId="20577"/>
+          <ac:chgData name="Zhiyang Zhou" userId="715b216a-9552-4d73-a9aa-1ef002111b6f" providerId="ADAL" clId="{2B661EA1-28DD-4C7A-9BAA-1E2E41397E83}" dt="2026-10-16T02:35:09.905" v="5354" actId="1076"/>
           <ac:spMkLst>
             <pc:docMk/>
             <pc:sldMk cId="0" sldId="323"/>
             <ac:spMk id="27651" creationId="{00000000-0000-0000-0000-000000000000}"/>
           </ac:spMkLst>
         </pc:spChg>
+        <pc:spChg chg="mod">
+          <ac:chgData name="Zhiyang Zhou" userId="715b216a-9552-4d73-a9aa-1ef002111b6f" providerId="ADAL" clId="{2B661EA1-28DD-4C7A-9BAA-1E2E41397E83}" dt="2026-10-16T02:32:32.362" v="5241" actId="20577"/>
+          <ac:spMkLst>
+            <pc:docMk/>
+            <pc:sldMk cId="0" sldId="323"/>
+            <ac:spMk id="43011" creationId="{00000000-0000-0000-0000-000000000000}"/>
+          </ac:spMkLst>
+        </pc:spChg>
         <pc:graphicFrameChg chg="add del mod topLvl">
-          <ac:chgData name="Zhiyang Zhou" userId="715b216a-9552-4d73-a9aa-1ef002111b6f" providerId="ADAL" clId="{2B661EA1-28DD-4C7A-9BAA-1E2E41397E83}" dt="2026-10-08T02:15:59.992" v="1315" actId="1076"/>
+          <ac:chgData name="Zhiyang Zhou" userId="715b216a-9552-4d73-a9aa-1ef002111b6f" providerId="ADAL" clId="{2B661EA1-28DD-4C7A-9BAA-1E2E41397E83}" dt="2026-10-16T02:29:36.474" v="5231" actId="1036"/>
           <ac:graphicFrameMkLst>
             <pc:docMk/>
             <pc:sldMk cId="0" sldId="323"/>
@@ -280,13 +303,21 @@
         </pc:spChg>
       </pc:sldChg>
       <pc:sldChg chg="delSp modSp mod modAnim">
-        <pc:chgData name="Zhiyang Zhou" userId="715b216a-9552-4d73-a9aa-1ef002111b6f" providerId="ADAL" clId="{2B661EA1-28DD-4C7A-9BAA-1E2E41397E83}" dt="2026-10-08T01:57:54.706" v="1012" actId="1076"/>
+        <pc:chgData name="Zhiyang Zhou" userId="715b216a-9552-4d73-a9aa-1ef002111b6f" providerId="ADAL" clId="{2B661EA1-28DD-4C7A-9BAA-1E2E41397E83}" dt="2026-10-16T02:14:58.655" v="5188" actId="20577"/>
         <pc:sldMkLst>
           <pc:docMk/>
           <pc:sldMk cId="0" sldId="326"/>
         </pc:sldMkLst>
         <pc:spChg chg="mod">
-          <ac:chgData name="Zhiyang Zhou" userId="715b216a-9552-4d73-a9aa-1ef002111b6f" providerId="ADAL" clId="{2B661EA1-28DD-4C7A-9BAA-1E2E41397E83}" dt="2026-10-08T01:57:54.706" v="1012" actId="1076"/>
+          <ac:chgData name="Zhiyang Zhou" userId="715b216a-9552-4d73-a9aa-1ef002111b6f" providerId="ADAL" clId="{2B661EA1-28DD-4C7A-9BAA-1E2E41397E83}" dt="2026-10-16T02:13:54.288" v="5149" actId="20577"/>
+          <ac:spMkLst>
+            <pc:docMk/>
+            <pc:sldMk cId="0" sldId="326"/>
+            <ac:spMk id="2" creationId="{00000000-0000-0000-0000-000000000000}"/>
+          </ac:spMkLst>
+        </pc:spChg>
+        <pc:spChg chg="mod">
+          <ac:chgData name="Zhiyang Zhou" userId="715b216a-9552-4d73-a9aa-1ef002111b6f" providerId="ADAL" clId="{2B661EA1-28DD-4C7A-9BAA-1E2E41397E83}" dt="2026-10-16T02:14:58.655" v="5188" actId="20577"/>
           <ac:spMkLst>
             <pc:docMk/>
             <pc:sldMk cId="0" sldId="326"/>
@@ -295,13 +326,13 @@
         </pc:spChg>
       </pc:sldChg>
       <pc:sldChg chg="modSp mod">
-        <pc:chgData name="Zhiyang Zhou" userId="715b216a-9552-4d73-a9aa-1ef002111b6f" providerId="ADAL" clId="{2B661EA1-28DD-4C7A-9BAA-1E2E41397E83}" dt="2026-10-08T02:18:56.165" v="1375" actId="20577"/>
+        <pc:chgData name="Zhiyang Zhou" userId="715b216a-9552-4d73-a9aa-1ef002111b6f" providerId="ADAL" clId="{2B661EA1-28DD-4C7A-9BAA-1E2E41397E83}" dt="2026-10-14T01:45:47.543" v="5072" actId="20577"/>
         <pc:sldMkLst>
           <pc:docMk/>
           <pc:sldMk cId="0" sldId="327"/>
         </pc:sldMkLst>
         <pc:spChg chg="mod">
-          <ac:chgData name="Zhiyang Zhou" userId="715b216a-9552-4d73-a9aa-1ef002111b6f" providerId="ADAL" clId="{2B661EA1-28DD-4C7A-9BAA-1E2E41397E83}" dt="2026-10-08T02:18:56.165" v="1375" actId="20577"/>
+          <ac:chgData name="Zhiyang Zhou" userId="715b216a-9552-4d73-a9aa-1ef002111b6f" providerId="ADAL" clId="{2B661EA1-28DD-4C7A-9BAA-1E2E41397E83}" dt="2026-10-14T01:45:47.543" v="5072" actId="20577"/>
           <ac:spMkLst>
             <pc:docMk/>
             <pc:sldMk cId="0" sldId="327"/>
@@ -355,14 +386,6 @@
             <ac:spMk id="10" creationId="{00000000-0000-0000-0000-000000000000}"/>
           </ac:spMkLst>
         </pc:spChg>
-        <pc:spChg chg="del">
-          <ac:chgData name="Zhiyang Zhou" userId="715b216a-9552-4d73-a9aa-1ef002111b6f" providerId="ADAL" clId="{2B661EA1-28DD-4C7A-9BAA-1E2E41397E83}" dt="2026-10-10T00:52:58.880" v="2584" actId="478"/>
-          <ac:spMkLst>
-            <pc:docMk/>
-            <pc:sldMk cId="0" sldId="329"/>
-            <ac:spMk id="48130" creationId="{00000000-0000-0000-0000-000000000000}"/>
-          </ac:spMkLst>
-        </pc:spChg>
         <pc:spChg chg="mod">
           <ac:chgData name="Zhiyang Zhou" userId="715b216a-9552-4d73-a9aa-1ef002111b6f" providerId="ADAL" clId="{2B661EA1-28DD-4C7A-9BAA-1E2E41397E83}" dt="2026-10-10T01:05:34.577" v="2675" actId="20577"/>
           <ac:spMkLst>
@@ -402,13 +425,6 @@
             <ac:spMk id="49156" creationId="{00000000-0000-0000-0000-000000000000}"/>
           </ac:spMkLst>
         </pc:spChg>
-      </pc:sldChg>
-      <pc:sldChg chg="del">
-        <pc:chgData name="Zhiyang Zhou" userId="715b216a-9552-4d73-a9aa-1ef002111b6f" providerId="ADAL" clId="{2B661EA1-28DD-4C7A-9BAA-1E2E41397E83}" dt="2026-10-10T02:15:08.853" v="3612" actId="47"/>
-        <pc:sldMkLst>
-          <pc:docMk/>
-          <pc:sldMk cId="0" sldId="332"/>
-        </pc:sldMkLst>
       </pc:sldChg>
       <pc:sldChg chg="addSp delSp modSp mod delAnim modAnim">
         <pc:chgData name="Zhiyang Zhou" userId="715b216a-9552-4d73-a9aa-1ef002111b6f" providerId="ADAL" clId="{2B661EA1-28DD-4C7A-9BAA-1E2E41397E83}" dt="2026-10-10T02:28:37.767" v="3978" actId="20577"/>
@@ -456,22 +472,6 @@
             <ac:spMk id="61448" creationId="{00000000-0000-0000-0000-000000000000}"/>
           </ac:spMkLst>
         </pc:spChg>
-        <pc:graphicFrameChg chg="del">
-          <ac:chgData name="Zhiyang Zhou" userId="715b216a-9552-4d73-a9aa-1ef002111b6f" providerId="ADAL" clId="{2B661EA1-28DD-4C7A-9BAA-1E2E41397E83}" dt="2026-10-10T02:26:05.021" v="3822" actId="478"/>
-          <ac:graphicFrameMkLst>
-            <pc:docMk/>
-            <pc:sldMk cId="0" sldId="334"/>
-            <ac:graphicFrameMk id="9" creationId="{00000000-0000-0000-0000-000000000000}"/>
-          </ac:graphicFrameMkLst>
-        </pc:graphicFrameChg>
-        <pc:graphicFrameChg chg="del mod">
-          <ac:chgData name="Zhiyang Zhou" userId="715b216a-9552-4d73-a9aa-1ef002111b6f" providerId="ADAL" clId="{2B661EA1-28DD-4C7A-9BAA-1E2E41397E83}" dt="2026-10-10T02:27:57.134" v="3973" actId="478"/>
-          <ac:graphicFrameMkLst>
-            <pc:docMk/>
-            <pc:sldMk cId="0" sldId="334"/>
-            <ac:graphicFrameMk id="12" creationId="{00000000-0000-0000-0000-000000000000}"/>
-          </ac:graphicFrameMkLst>
-        </pc:graphicFrameChg>
       </pc:sldChg>
       <pc:sldChg chg="addSp delSp modSp mod modAnim">
         <pc:chgData name="Zhiyang Zhou" userId="715b216a-9552-4d73-a9aa-1ef002111b6f" providerId="ADAL" clId="{2B661EA1-28DD-4C7A-9BAA-1E2E41397E83}" dt="2026-10-10T02:22:35.606" v="3807" actId="20577"/>
@@ -519,22 +519,6 @@
             <ac:spMk id="54276" creationId="{00000000-0000-0000-0000-000000000000}"/>
           </ac:spMkLst>
         </pc:spChg>
-        <pc:grpChg chg="add del mod">
-          <ac:chgData name="Zhiyang Zhou" userId="715b216a-9552-4d73-a9aa-1ef002111b6f" providerId="ADAL" clId="{2B661EA1-28DD-4C7A-9BAA-1E2E41397E83}" dt="2026-10-10T02:19:12.433" v="3730" actId="165"/>
-          <ac:grpSpMkLst>
-            <pc:docMk/>
-            <pc:sldMk cId="0" sldId="335"/>
-            <ac:grpSpMk id="2" creationId="{00000000-0000-0000-0000-000000000000}"/>
-          </ac:grpSpMkLst>
-        </pc:grpChg>
-        <pc:graphicFrameChg chg="del mod">
-          <ac:chgData name="Zhiyang Zhou" userId="715b216a-9552-4d73-a9aa-1ef002111b6f" providerId="ADAL" clId="{2B661EA1-28DD-4C7A-9BAA-1E2E41397E83}" dt="2026-10-10T02:18:16.771" v="3719" actId="478"/>
-          <ac:graphicFrameMkLst>
-            <pc:docMk/>
-            <pc:sldMk cId="0" sldId="335"/>
-            <ac:graphicFrameMk id="54281" creationId="{00000000-0000-0000-0000-000000000000}"/>
-          </ac:graphicFrameMkLst>
-        </pc:graphicFrameChg>
       </pc:sldChg>
       <pc:sldChg chg="modSp mod">
         <pc:chgData name="Zhiyang Zhou" userId="715b216a-9552-4d73-a9aa-1ef002111b6f" providerId="ADAL" clId="{2B661EA1-28DD-4C7A-9BAA-1E2E41397E83}" dt="2026-10-10T03:19:48.240" v="4039" actId="20577"/>
@@ -758,30 +742,6 @@
             <ac:spMk id="25" creationId="{00000000-0000-0000-0000-000000000000}"/>
           </ac:spMkLst>
         </pc:spChg>
-        <pc:spChg chg="del mod">
-          <ac:chgData name="Zhiyang Zhou" userId="715b216a-9552-4d73-a9aa-1ef002111b6f" providerId="ADAL" clId="{2B661EA1-28DD-4C7A-9BAA-1E2E41397E83}" dt="2026-10-10T04:01:39.272" v="4655" actId="478"/>
-          <ac:spMkLst>
-            <pc:docMk/>
-            <pc:sldMk cId="0" sldId="350"/>
-            <ac:spMk id="63499" creationId="{00000000-0000-0000-0000-000000000000}"/>
-          </ac:spMkLst>
-        </pc:spChg>
-        <pc:graphicFrameChg chg="del">
-          <ac:chgData name="Zhiyang Zhou" userId="715b216a-9552-4d73-a9aa-1ef002111b6f" providerId="ADAL" clId="{2B661EA1-28DD-4C7A-9BAA-1E2E41397E83}" dt="2026-10-10T04:06:59.495" v="4788" actId="478"/>
-          <ac:graphicFrameMkLst>
-            <pc:docMk/>
-            <pc:sldMk cId="0" sldId="350"/>
-            <ac:graphicFrameMk id="12" creationId="{00000000-0000-0000-0000-000000000000}"/>
-          </ac:graphicFrameMkLst>
-        </pc:graphicFrameChg>
-        <pc:graphicFrameChg chg="del mod">
-          <ac:chgData name="Zhiyang Zhou" userId="715b216a-9552-4d73-a9aa-1ef002111b6f" providerId="ADAL" clId="{2B661EA1-28DD-4C7A-9BAA-1E2E41397E83}" dt="2026-10-10T04:04:06.711" v="4736" actId="478"/>
-          <ac:graphicFrameMkLst>
-            <pc:docMk/>
-            <pc:sldMk cId="0" sldId="350"/>
-            <ac:graphicFrameMk id="63498" creationId="{00000000-0000-0000-0000-000000000000}"/>
-          </ac:graphicFrameMkLst>
-        </pc:graphicFrameChg>
       </pc:sldChg>
       <pc:sldChg chg="modSp mod">
         <pc:chgData name="Zhiyang Zhou" userId="715b216a-9552-4d73-a9aa-1ef002111b6f" providerId="ADAL" clId="{2B661EA1-28DD-4C7A-9BAA-1E2E41397E83}" dt="2026-10-10T03:58:43.857" v="4608" actId="20577"/>
@@ -834,14 +794,6 @@
             <pc:docMk/>
             <pc:sldMk cId="3939205418" sldId="352"/>
             <ac:spMk id="3" creationId="{00000000-0000-0000-0000-000000000000}"/>
-          </ac:spMkLst>
-        </pc:spChg>
-        <pc:spChg chg="add del mod">
-          <ac:chgData name="Zhiyang Zhou" userId="715b216a-9552-4d73-a9aa-1ef002111b6f" providerId="ADAL" clId="{2B661EA1-28DD-4C7A-9BAA-1E2E41397E83}" dt="2026-10-10T01:30:59.827" v="3030" actId="478"/>
-          <ac:spMkLst>
-            <pc:docMk/>
-            <pc:sldMk cId="3939205418" sldId="352"/>
-            <ac:spMk id="5" creationId="{FC9E6AEB-52D0-00E4-06F9-C95282C6E78E}"/>
           </ac:spMkLst>
         </pc:spChg>
         <pc:spChg chg="add mod">
@@ -908,13 +860,13 @@
         </pc:grpChg>
       </pc:sldChg>
       <pc:sldChg chg="modSp mod">
-        <pc:chgData name="Zhiyang Zhou" userId="715b216a-9552-4d73-a9aa-1ef002111b6f" providerId="ADAL" clId="{2B661EA1-28DD-4C7A-9BAA-1E2E41397E83}" dt="2026-10-08T02:12:22.977" v="1273" actId="20577"/>
+        <pc:chgData name="Zhiyang Zhou" userId="715b216a-9552-4d73-a9aa-1ef002111b6f" providerId="ADAL" clId="{2B661EA1-28DD-4C7A-9BAA-1E2E41397E83}" dt="2026-10-16T02:11:52.429" v="5100" actId="20577"/>
         <pc:sldMkLst>
           <pc:docMk/>
           <pc:sldMk cId="1712410489" sldId="356"/>
         </pc:sldMkLst>
         <pc:spChg chg="mod">
-          <ac:chgData name="Zhiyang Zhou" userId="715b216a-9552-4d73-a9aa-1ef002111b6f" providerId="ADAL" clId="{2B661EA1-28DD-4C7A-9BAA-1E2E41397E83}" dt="2026-10-08T02:07:19.066" v="1169" actId="20577"/>
+          <ac:chgData name="Zhiyang Zhou" userId="715b216a-9552-4d73-a9aa-1ef002111b6f" providerId="ADAL" clId="{2B661EA1-28DD-4C7A-9BAA-1E2E41397E83}" dt="2026-10-16T02:11:52.429" v="5100" actId="20577"/>
           <ac:spMkLst>
             <pc:docMk/>
             <pc:sldMk cId="1712410489" sldId="356"/>
@@ -922,20 +874,13 @@
           </ac:spMkLst>
         </pc:spChg>
         <pc:spChg chg="mod">
-          <ac:chgData name="Zhiyang Zhou" userId="715b216a-9552-4d73-a9aa-1ef002111b6f" providerId="ADAL" clId="{2B661EA1-28DD-4C7A-9BAA-1E2E41397E83}" dt="2026-10-08T02:12:22.977" v="1273" actId="20577"/>
+          <ac:chgData name="Zhiyang Zhou" userId="715b216a-9552-4d73-a9aa-1ef002111b6f" providerId="ADAL" clId="{2B661EA1-28DD-4C7A-9BAA-1E2E41397E83}" dt="2026-10-16T02:11:38.615" v="5099"/>
           <ac:spMkLst>
             <pc:docMk/>
             <pc:sldMk cId="1712410489" sldId="356"/>
             <ac:spMk id="41987" creationId="{00000000-0000-0000-0000-000000000000}"/>
           </ac:spMkLst>
         </pc:spChg>
-      </pc:sldChg>
-      <pc:sldChg chg="add del">
-        <pc:chgData name="Zhiyang Zhou" userId="715b216a-9552-4d73-a9aa-1ef002111b6f" providerId="ADAL" clId="{2B661EA1-28DD-4C7A-9BAA-1E2E41397E83}" dt="2026-10-10T02:30:05.572" v="3981" actId="47"/>
-        <pc:sldMkLst>
-          <pc:docMk/>
-          <pc:sldMk cId="4285640818" sldId="357"/>
-        </pc:sldMkLst>
       </pc:sldChg>
       <pc:sldChg chg="addSp delSp modSp mod delAnim modAnim">
         <pc:chgData name="Zhiyang Zhou" userId="715b216a-9552-4d73-a9aa-1ef002111b6f" providerId="ADAL" clId="{2B661EA1-28DD-4C7A-9BAA-1E2E41397E83}" dt="2026-10-10T03:41:27.862" v="4360" actId="1076"/>
@@ -949,14 +894,6 @@
             <pc:docMk/>
             <pc:sldMk cId="2761395656" sldId="358"/>
             <ac:spMk id="4" creationId="{7589CAA4-328E-2C8A-4B6E-07D36DEF4E01}"/>
-          </ac:spMkLst>
-        </pc:spChg>
-        <pc:spChg chg="add del">
-          <ac:chgData name="Zhiyang Zhou" userId="715b216a-9552-4d73-a9aa-1ef002111b6f" providerId="ADAL" clId="{2B661EA1-28DD-4C7A-9BAA-1E2E41397E83}" dt="2026-10-10T03:40:45.886" v="4350" actId="22"/>
-          <ac:spMkLst>
-            <pc:docMk/>
-            <pc:sldMk cId="2761395656" sldId="358"/>
-            <ac:spMk id="6" creationId="{85435EF6-1FC2-1A73-5754-437BBA6510AD}"/>
           </ac:spMkLst>
         </pc:spChg>
         <pc:spChg chg="add mod">
@@ -999,22 +936,6 @@
             <ac:spMk id="27" creationId="{00000000-0000-0000-0000-000000000000}"/>
           </ac:spMkLst>
         </pc:spChg>
-        <pc:spChg chg="del">
-          <ac:chgData name="Zhiyang Zhou" userId="715b216a-9552-4d73-a9aa-1ef002111b6f" providerId="ADAL" clId="{2B661EA1-28DD-4C7A-9BAA-1E2E41397E83}" dt="2026-10-10T03:40:41.652" v="4347" actId="478"/>
-          <ac:spMkLst>
-            <pc:docMk/>
-            <pc:sldMk cId="2761395656" sldId="358"/>
-            <ac:spMk id="29" creationId="{00000000-0000-0000-0000-000000000000}"/>
-          </ac:spMkLst>
-        </pc:spChg>
-        <pc:spChg chg="del">
-          <ac:chgData name="Zhiyang Zhou" userId="715b216a-9552-4d73-a9aa-1ef002111b6f" providerId="ADAL" clId="{2B661EA1-28DD-4C7A-9BAA-1E2E41397E83}" dt="2026-10-10T03:40:42.253" v="4348" actId="478"/>
-          <ac:spMkLst>
-            <pc:docMk/>
-            <pc:sldMk cId="2761395656" sldId="358"/>
-            <ac:spMk id="30" creationId="{00000000-0000-0000-0000-000000000000}"/>
-          </ac:spMkLst>
-        </pc:spChg>
         <pc:spChg chg="mod">
           <ac:chgData name="Zhiyang Zhou" userId="715b216a-9552-4d73-a9aa-1ef002111b6f" providerId="ADAL" clId="{2B661EA1-28DD-4C7A-9BAA-1E2E41397E83}" dt="2026-10-10T03:23:40.008" v="4219" actId="14100"/>
           <ac:spMkLst>
@@ -1039,30 +960,6 @@
             <ac:spMk id="56325" creationId="{00000000-0000-0000-0000-000000000000}"/>
           </ac:spMkLst>
         </pc:spChg>
-        <pc:graphicFrameChg chg="del">
-          <ac:chgData name="Zhiyang Zhou" userId="715b216a-9552-4d73-a9aa-1ef002111b6f" providerId="ADAL" clId="{2B661EA1-28DD-4C7A-9BAA-1E2E41397E83}" dt="2026-10-10T03:40:40.611" v="4346" actId="478"/>
-          <ac:graphicFrameMkLst>
-            <pc:docMk/>
-            <pc:sldMk cId="2761395656" sldId="358"/>
-            <ac:graphicFrameMk id="14" creationId="{00000000-0000-0000-0000-000000000000}"/>
-          </ac:graphicFrameMkLst>
-        </pc:graphicFrameChg>
-        <pc:graphicFrameChg chg="del">
-          <ac:chgData name="Zhiyang Zhou" userId="715b216a-9552-4d73-a9aa-1ef002111b6f" providerId="ADAL" clId="{2B661EA1-28DD-4C7A-9BAA-1E2E41397E83}" dt="2026-10-10T03:40:40.611" v="4346" actId="478"/>
-          <ac:graphicFrameMkLst>
-            <pc:docMk/>
-            <pc:sldMk cId="2761395656" sldId="358"/>
-            <ac:graphicFrameMk id="23" creationId="{00000000-0000-0000-0000-000000000000}"/>
-          </ac:graphicFrameMkLst>
-        </pc:graphicFrameChg>
-        <pc:graphicFrameChg chg="del">
-          <ac:chgData name="Zhiyang Zhou" userId="715b216a-9552-4d73-a9aa-1ef002111b6f" providerId="ADAL" clId="{2B661EA1-28DD-4C7A-9BAA-1E2E41397E83}" dt="2026-10-10T03:40:40.611" v="4346" actId="478"/>
-          <ac:graphicFrameMkLst>
-            <pc:docMk/>
-            <pc:sldMk cId="2761395656" sldId="358"/>
-            <ac:graphicFrameMk id="28" creationId="{00000000-0000-0000-0000-000000000000}"/>
-          </ac:graphicFrameMkLst>
-        </pc:graphicFrameChg>
       </pc:sldChg>
       <pc:sldChg chg="modSp mod">
         <pc:chgData name="Zhiyang Zhou" userId="715b216a-9552-4d73-a9aa-1ef002111b6f" providerId="ADAL" clId="{2B661EA1-28DD-4C7A-9BAA-1E2E41397E83}" dt="2026-10-10T03:46:42.757" v="4560" actId="20577"/>
@@ -1086,13 +983,6 @@
             <ac:spMk id="57347" creationId="{00000000-0000-0000-0000-000000000000}"/>
           </ac:spMkLst>
         </pc:spChg>
-      </pc:sldChg>
-      <pc:sldChg chg="addSp delSp modSp add del mod delAnim modAnim">
-        <pc:chgData name="Zhiyang Zhou" userId="715b216a-9552-4d73-a9aa-1ef002111b6f" providerId="ADAL" clId="{2B661EA1-28DD-4C7A-9BAA-1E2E41397E83}" dt="2026-10-10T02:15:20.431" v="3615" actId="47"/>
-        <pc:sldMkLst>
-          <pc:docMk/>
-          <pc:sldMk cId="2120150609" sldId="360"/>
-        </pc:sldMkLst>
       </pc:sldChg>
       <pc:sldChg chg="delSp modSp add mod delAnim modAnim">
         <pc:chgData name="Zhiyang Zhou" userId="715b216a-9552-4d73-a9aa-1ef002111b6f" providerId="ADAL" clId="{2B661EA1-28DD-4C7A-9BAA-1E2E41397E83}" dt="2026-10-08T17:10:07.167" v="2555" actId="20577"/>
@@ -1241,7 +1131,7 @@
               <a:pPr>
                 <a:defRPr/>
               </a:pPr>
-              <a:t>10/9/2026</a:t>
+              <a:t>10/15/2026</a:t>
             </a:fld>
             <a:endParaRPr lang="en-US" altLang="en-US"/>
           </a:p>
@@ -1456,7 +1346,7 @@
               <a:pPr>
                 <a:defRPr/>
               </a:pPr>
-              <a:t>10/9/2026</a:t>
+              <a:t>10/15/2026</a:t>
             </a:fld>
             <a:endParaRPr lang="en-US" altLang="en-US"/>
           </a:p>
@@ -11473,7 +11363,7 @@
                 </a:solidFill>
                 <a:ea typeface="ＭＳ Ｐゴシック" pitchFamily="34" charset="-128"/>
               </a:rPr>
-              <a:t>Population distribution</a:t>
+              <a:t>Probability distribution</a:t>
             </a:r>
           </a:p>
           <a:p>
@@ -11489,7 +11379,7 @@
                 </a:solidFill>
                 <a:ea typeface="ＭＳ Ｐゴシック" pitchFamily="34" charset="-128"/>
               </a:rPr>
-              <a:t>The mean and standard deviation of the sample mean</a:t>
+              <a:t>Mean and standard deviation of the sample mean</a:t>
             </a:r>
           </a:p>
           <a:p>
@@ -11505,7 +11395,7 @@
                 </a:solidFill>
                 <a:ea typeface="ＭＳ Ｐゴシック" pitchFamily="34" charset="-128"/>
               </a:rPr>
-              <a:t>Sampling distribution of a sample mean</a:t>
+              <a:t>Sampling distribution of the sample mean</a:t>
             </a:r>
           </a:p>
           <a:p>
@@ -11751,7 +11641,15 @@
           <a:p>
             <a:r>
               <a:rPr lang="en-US" altLang="en-US" dirty="0"/>
-              <a:t>Population Distribution</a:t>
+              <a:t>Pro</a:t>
+            </a:r>
+            <a:r>
+              <a:rPr lang="en-US" altLang="zh-CN" dirty="0"/>
+              <a:t>bability</a:t>
+            </a:r>
+            <a:r>
+              <a:rPr lang="en-US" altLang="en-US" dirty="0"/>
+              <a:t> Distribution</a:t>
             </a:r>
             <a:endParaRPr lang="en-US" dirty="0"/>
           </a:p>
@@ -12201,20 +12099,28 @@
               <a:t>The </a:t>
             </a:r>
             <a:r>
-              <a:rPr lang="en-US" altLang="en-US" b="1" dirty="0">
-                <a:solidFill>
-                  <a:srgbClr val="800000"/>
+              <a:rPr lang="en-US" altLang="en-US" dirty="0">
+                <a:solidFill>
+                  <a:srgbClr val="FF0000"/>
                 </a:solidFill>
               </a:rPr>
-              <a:t>population distribution</a:t>
+              <a:t>(probability) distribution</a:t>
             </a:r>
             <a:r>
               <a:rPr lang="en-US" altLang="en-US" dirty="0">
                 <a:solidFill>
-                  <a:srgbClr val="800000"/>
+                  <a:srgbClr val="000000"/>
                 </a:solidFill>
               </a:rPr>
-              <a:t> </a:t>
+              <a:t> of a variable measured on a randomly selected individual describes the possible values of that variable and how likely each value is to occur. Th</a:t>
+            </a:r>
+            <a:r>
+              <a:rPr lang="en-US" altLang="zh-CN" dirty="0">
+                <a:solidFill>
+                  <a:srgbClr val="000000"/>
+                </a:solidFill>
+              </a:rPr>
+              <a:t>is distribution</a:t>
             </a:r>
             <a:r>
               <a:rPr lang="en-US" altLang="en-US" dirty="0">
@@ -12222,23 +12128,7 @@
                   <a:srgbClr val="000000"/>
                 </a:solidFill>
               </a:rPr>
-              <a:t>of a variable is the distribution of values of the variable among </a:t>
-            </a:r>
-            <a:r>
-              <a:rPr lang="en-US" altLang="en-US" dirty="0">
-                <a:solidFill>
-                  <a:srgbClr val="FF0000"/>
-                </a:solidFill>
-              </a:rPr>
-              <a:t>all individuals in the population</a:t>
-            </a:r>
-            <a:r>
-              <a:rPr lang="en-US" altLang="en-US" dirty="0">
-                <a:solidFill>
-                  <a:srgbClr val="000000"/>
-                </a:solidFill>
-              </a:rPr>
-              <a:t>. The population distribution is also the probability distribution of the variable when we choose one individual at random from the population.</a:t>
+              <a:t> depends on how the individual is selected.</a:t>
             </a:r>
           </a:p>
         </p:txBody>
@@ -13207,7 +13097,7 @@
           <a:p>
             <a:r>
               <a:rPr lang="en-US" altLang="en-US" dirty="0"/>
-              <a:t>The Sampling Distribution of </a:t>
+              <a:t>Sampling Distribution of </a:t>
             </a:r>
             <a:br>
               <a:rPr lang="en-US" altLang="en-US" dirty="0"/>
@@ -13490,7 +13380,7 @@
         <p:spPr bwMode="auto">
           <a:xfrm>
             <a:off x="350042" y="1618812"/>
-            <a:ext cx="8477250" cy="1016000"/>
+            <a:ext cx="8477250" cy="1323439"/>
           </a:xfrm>
           <a:prstGeom prst="rect">
             <a:avLst/>
@@ -13681,7 +13571,7 @@
                   <a:srgbClr val="000000"/>
                 </a:solidFill>
               </a:rPr>
-              <a:t> and is less spread out than the population distribution. Here are the facts.</a:t>
+              <a:t> and  has a smaller standard deviation than the probability distribution of individual observations. Here are the facts.</a:t>
             </a:r>
           </a:p>
         </p:txBody>
@@ -15343,7 +15233,7 @@
               <a:rPr lang="en-US" altLang="en-US" dirty="0">
                 <a:ea typeface="ＭＳ Ｐゴシック" pitchFamily="34" charset="-128"/>
               </a:rPr>
-              <a:t>The Central Limit Theorem</a:t>
+              <a:t>Central Limit Theorem</a:t>
             </a:r>
           </a:p>
         </p:txBody>
@@ -15550,7 +15440,7 @@
         </p:nvSpPr>
         <p:spPr bwMode="auto">
           <a:xfrm>
-            <a:off x="463550" y="1046163"/>
+            <a:off x="431006" y="1035110"/>
             <a:ext cx="8229600" cy="3323987"/>
           </a:xfrm>
           <a:prstGeom prst="rect">
@@ -15596,7 +15486,7 @@
                   <a:srgbClr val="000000"/>
                 </a:solidFill>
               </a:rPr>
-              <a:t>Most population distributions are not normal. What is the shape of the sampling distribution of sample means when the population distribution is not normal?</a:t>
+              <a:t>The probability distribution of individual observations is often not normal. What is the shape of the sampling distribution of the sample mean when individual observations do not follow a normal distribution?</a:t>
             </a:r>
           </a:p>
           <a:p>
@@ -15643,31 +15533,23 @@
                   <a:srgbClr val="000000"/>
                 </a:solidFill>
               </a:rPr>
-              <a:t>When the sample size is large enough, the (sampling) distribution of sample mean is very close to normal, </a:t>
-            </a:r>
-            <a:r>
-              <a:rPr lang="en-US" altLang="en-US" sz="2000" i="1" dirty="0">
+              <a:t>When the sample size is sufficiently large, the sampling distribution of the sample mean is approximately normal, </a:t>
+            </a:r>
+            <a:r>
+              <a:rPr lang="en-US" altLang="en-US" sz="2000" dirty="0">
                 <a:solidFill>
                   <a:srgbClr val="FF0000"/>
                 </a:solidFill>
               </a:rPr>
-              <a:t>no matter what shape the population distribution has</a:t>
-            </a:r>
-            <a:r>
-              <a:rPr lang="en-US" altLang="en-US" sz="2000" i="1" dirty="0">
+              <a:t>regardless of the distribution of individual observations</a:t>
+            </a:r>
+            <a:r>
+              <a:rPr lang="en-US" altLang="en-US" sz="2000" dirty="0">
                 <a:solidFill>
                   <a:srgbClr val="000000"/>
                 </a:solidFill>
               </a:rPr>
-              <a:t>, </a:t>
-            </a:r>
-            <a:r>
-              <a:rPr lang="en-US" altLang="en-US" sz="2000" dirty="0">
-                <a:solidFill>
-                  <a:srgbClr val="000000"/>
-                </a:solidFill>
-              </a:rPr>
-              <a:t>as long as the population has a finite standard deviation.</a:t>
+              <a:t>, provided that the observations form an SRS and the distribution has a finite standard deviation.</a:t>
             </a:r>
           </a:p>
         </p:txBody>
@@ -15682,7 +15564,7 @@
         </p:nvSpPr>
         <p:spPr bwMode="auto">
           <a:xfrm>
-            <a:off x="596900" y="4383777"/>
+            <a:off x="596900" y="4564837"/>
             <a:ext cx="7981950" cy="2122487"/>
           </a:xfrm>
           <a:prstGeom prst="rect">
@@ -16272,13 +16154,13 @@
           <p:nvPr>
             <p:extLst>
               <p:ext uri="{D42A27DB-BD31-4B8C-83A1-F6EECF244321}">
-                <p14:modId xmlns:p14="http://schemas.microsoft.com/office/powerpoint/2010/main" val="1821876697"/>
+                <p14:modId xmlns:p14="http://schemas.microsoft.com/office/powerpoint/2010/main" val="1481987435"/>
               </p:ext>
             </p:extLst>
           </p:nvPr>
         </p:nvGraphicFramePr>
         <p:xfrm>
-          <a:off x="941388" y="4438650"/>
+          <a:off x="941388" y="4619710"/>
           <a:ext cx="7208837" cy="1993900"/>
         </p:xfrm>
         <a:graphic>
@@ -16315,7 +16197,7 @@
                     </p:blipFill>
                     <p:spPr bwMode="auto">
                       <a:xfrm>
-                        <a:off x="941388" y="4438650"/>
+                        <a:off x="941388" y="4619710"/>
                         <a:ext cx="7208837" cy="1993900"/>
                       </a:xfrm>
                       <a:prstGeom prst="rect">
@@ -16479,67 +16361,6 @@
                                           <p:spTgt spid="27651">
                                             <p:txEl>
                                               <p:pRg st="1" end="1"/>
-                                            </p:txEl>
-                                          </p:spTgt>
-                                        </p:tgtEl>
-                                      </p:cBhvr>
-                                    </p:animEffect>
-                                  </p:childTnLst>
-                                </p:cTn>
-                              </p:par>
-                            </p:childTnLst>
-                          </p:cTn>
-                        </p:par>
-                      </p:childTnLst>
-                    </p:cTn>
-                  </p:par>
-                  <p:par>
-                    <p:cTn id="13" fill="hold" nodeType="clickPar">
-                      <p:stCondLst>
-                        <p:cond delay="indefinite"/>
-                      </p:stCondLst>
-                      <p:childTnLst>
-                        <p:par>
-                          <p:cTn id="14" fill="hold" nodeType="withGroup">
-                            <p:stCondLst>
-                              <p:cond delay="0"/>
-                            </p:stCondLst>
-                            <p:childTnLst>
-                              <p:par>
-                                <p:cTn id="15" presetID="10" presetClass="entr" presetSubtype="0" fill="hold" grpId="0" nodeType="clickEffect">
-                                  <p:stCondLst>
-                                    <p:cond delay="0"/>
-                                  </p:stCondLst>
-                                  <p:childTnLst>
-                                    <p:set>
-                                      <p:cBhvr>
-                                        <p:cTn id="16" dur="1" fill="hold">
-                                          <p:stCondLst>
-                                            <p:cond delay="0"/>
-                                          </p:stCondLst>
-                                        </p:cTn>
-                                        <p:tgtEl>
-                                          <p:spTgt spid="27651">
-                                            <p:txEl>
-                                              <p:pRg st="2" end="2"/>
-                                            </p:txEl>
-                                          </p:spTgt>
-                                        </p:tgtEl>
-                                        <p:attrNameLst>
-                                          <p:attrName>style.visibility</p:attrName>
-                                        </p:attrNameLst>
-                                      </p:cBhvr>
-                                      <p:to>
-                                        <p:strVal val="visible"/>
-                                      </p:to>
-                                    </p:set>
-                                    <p:animEffect transition="in" filter="fade">
-                                      <p:cBhvr>
-                                        <p:cTn id="17" dur="500"/>
-                                        <p:tgtEl>
-                                          <p:spTgt spid="27651">
-                                            <p:txEl>
-                                              <p:pRg st="2" end="2"/>
                                             </p:txEl>
                                           </p:spTgt>
                                         </p:tgtEl>
@@ -19326,7 +19147,7 @@
         <p:spPr bwMode="auto">
           <a:xfrm>
             <a:off x="3378201" y="1727675"/>
-            <a:ext cx="5384800" cy="3847207"/>
+            <a:ext cx="5384800" cy="3539430"/>
           </a:xfrm>
           <a:prstGeom prst="rect">
             <a:avLst/>
@@ -19365,22 +19186,19 @@
               <a:rPr lang="en-US" altLang="en-US" sz="2000" dirty="0">
                 <a:sym typeface="Symbol" pitchFamily="18" charset="2"/>
               </a:rPr>
-              <a:t>Any linear combination of </a:t>
-            </a:r>
-            <a:r>
-              <a:rPr lang="en-US" altLang="en-US" sz="2000" dirty="0">
-                <a:solidFill>
-                  <a:srgbClr val="FF0000"/>
-                </a:solidFill>
+              <a:t>Any linear combination </a:t>
+            </a:r>
+            <a:r>
+              <a:rPr lang="en-US" altLang="en-US" sz="2000">
                 <a:sym typeface="Symbol" pitchFamily="18" charset="2"/>
               </a:rPr>
-              <a:t>independent</a:t>
+              <a:t>of normal </a:t>
             </a:r>
             <a:r>
               <a:rPr lang="en-US" altLang="en-US" sz="2000" dirty="0">
                 <a:sym typeface="Symbol" pitchFamily="18" charset="2"/>
               </a:rPr>
-              <a:t> Normal random variables is also normally distributed. </a:t>
+              <a:t>random variables is also normally distributed. </a:t>
             </a:r>
           </a:p>
           <a:p>
@@ -23418,8 +23236,8 @@
           </a:p>
         </p:txBody>
       </p:sp>
-      <mc:AlternateContent xmlns:mc="http://schemas.openxmlformats.org/markup-compatibility/2006">
-        <mc:Choice xmlns:a14="http://schemas.microsoft.com/office/drawing/2010/main" Requires="a14">
+      <mc:AlternateContent xmlns:mc="http://schemas.openxmlformats.org/markup-compatibility/2006" xmlns:a14="http://schemas.microsoft.com/office/drawing/2010/main">
+        <mc:Choice Requires="a14">
           <p:sp>
             <p:nvSpPr>
               <p:cNvPr id="3" name="TextBox 2"/>
@@ -23825,6 +23643,7 @@
                 </a:r>
               </a:p>
               <a:p>
+                <a:pPr/>
                 <a14:m>
                   <m:oMathPara xmlns:m="http://schemas.openxmlformats.org/officeDocument/2006/math">
                     <m:oMath>
@@ -23973,13 +23792,7 @@
                             <a:rPr lang="en-US" b="0" i="1" smtClean="0">
                               <a:latin typeface="Cambria Math" panose="02040503050406030204" pitchFamily="18" charset="0"/>
                             </a:rPr>
-                            <m:t>(</m:t>
-                          </m:r>
-                          <m:r>
-                            <a:rPr lang="en-US" b="0" i="1" smtClean="0">
-                              <a:latin typeface="Cambria Math" panose="02040503050406030204" pitchFamily="18" charset="0"/>
-                            </a:rPr>
-                            <m:t>.7)</m:t>
+                            <m:t>(.7)</m:t>
                           </m:r>
                         </m:e>
                         <m:sup>
@@ -24011,7 +23824,7 @@
             </p:txBody>
           </p:sp>
         </mc:Choice>
-        <mc:Fallback>
+        <mc:Fallback xmlns="">
           <p:sp>
             <p:nvSpPr>
               <p:cNvPr id="3" name="TextBox 2"/>
@@ -24781,8 +24594,8 @@
           </a:p>
         </p:txBody>
       </p:sp>
-      <mc:AlternateContent xmlns:mc="http://schemas.openxmlformats.org/markup-compatibility/2006">
-        <mc:Choice xmlns:a14="http://schemas.microsoft.com/office/drawing/2010/main" Requires="a14">
+      <mc:AlternateContent xmlns:mc="http://schemas.openxmlformats.org/markup-compatibility/2006" xmlns:a14="http://schemas.microsoft.com/office/drawing/2010/main">
+        <mc:Choice Requires="a14">
           <p:sp>
             <p:nvSpPr>
               <p:cNvPr id="61448" name="TextBox 8"/>
@@ -25105,7 +24918,7 @@
             </p:txBody>
           </p:sp>
         </mc:Choice>
-        <mc:Fallback>
+        <mc:Fallback xmlns="">
           <p:sp>
             <p:nvSpPr>
               <p:cNvPr id="61448" name="TextBox 8"/>
@@ -26077,8 +25890,8 @@
           </a:p>
         </p:txBody>
       </p:sp>
-      <mc:AlternateContent xmlns:mc="http://schemas.openxmlformats.org/markup-compatibility/2006">
-        <mc:Choice xmlns:a14="http://schemas.microsoft.com/office/drawing/2010/main" Requires="a14">
+      <mc:AlternateContent xmlns:mc="http://schemas.openxmlformats.org/markup-compatibility/2006" xmlns:a14="http://schemas.microsoft.com/office/drawing/2010/main">
+        <mc:Choice Requires="a14">
           <p:sp>
             <p:nvSpPr>
               <p:cNvPr id="54276" name="TextBox 1"/>
@@ -26345,7 +26158,7 @@
             </p:txBody>
           </p:sp>
         </mc:Choice>
-        <mc:Fallback>
+        <mc:Fallback xmlns="">
           <p:sp>
             <p:nvSpPr>
               <p:cNvPr id="54276" name="TextBox 1"/>
@@ -26479,8 +26292,8 @@
           </a:p>
         </p:txBody>
       </p:sp>
-      <mc:AlternateContent xmlns:mc="http://schemas.openxmlformats.org/markup-compatibility/2006">
-        <mc:Choice xmlns:a14="http://schemas.microsoft.com/office/drawing/2010/main" Requires="a14">
+      <mc:AlternateContent xmlns:mc="http://schemas.openxmlformats.org/markup-compatibility/2006" xmlns:a14="http://schemas.microsoft.com/office/drawing/2010/main">
+        <mc:Choice Requires="a14">
           <p:sp>
             <p:nvSpPr>
               <p:cNvPr id="9" name="TextBox 8"/>
@@ -27007,7 +26820,7 @@
             </p:txBody>
           </p:sp>
         </mc:Choice>
-        <mc:Fallback>
+        <mc:Fallback xmlns="">
           <p:sp>
             <p:nvSpPr>
               <p:cNvPr id="9" name="TextBox 8"/>
@@ -27986,8 +27799,8 @@
             </a:p>
           </p:txBody>
         </p:sp>
-        <mc:AlternateContent xmlns:mc="http://schemas.openxmlformats.org/markup-compatibility/2006">
-          <mc:Choice xmlns:a14="http://schemas.microsoft.com/office/drawing/2010/main" Requires="a14">
+        <mc:AlternateContent xmlns:mc="http://schemas.openxmlformats.org/markup-compatibility/2006" xmlns:a14="http://schemas.microsoft.com/office/drawing/2010/main">
+          <mc:Choice Requires="a14">
             <p:sp>
               <p:nvSpPr>
                 <p:cNvPr id="16" name="TextBox 15"/>
@@ -28534,7 +28347,7 @@
               </p:txBody>
             </p:sp>
           </mc:Choice>
-          <mc:Fallback>
+          <mc:Fallback xmlns="">
             <p:sp>
               <p:nvSpPr>
                 <p:cNvPr id="16" name="TextBox 15"/>
@@ -32032,8 +31845,8 @@
           </a:prstGeom>
         </p:spPr>
       </p:pic>
-      <mc:AlternateContent xmlns:mc="http://schemas.openxmlformats.org/markup-compatibility/2006">
-        <mc:Choice xmlns:a14="http://schemas.microsoft.com/office/drawing/2010/main" Requires="a14">
+      <mc:AlternateContent xmlns:mc="http://schemas.openxmlformats.org/markup-compatibility/2006" xmlns:a14="http://schemas.microsoft.com/office/drawing/2010/main">
+        <mc:Choice Requires="a14">
           <p:sp>
             <p:nvSpPr>
               <p:cNvPr id="4" name="TextBox 3"/>
@@ -32161,16 +31974,7 @@
                             <a:rPr lang="en-US" b="0" i="0" smtClean="0">
                               <a:latin typeface="Cambria Math"/>
                             </a:rPr>
-                            <m:t>number</m:t>
-                          </m:r>
-                          <m:r>
-                            <m:rPr>
-                              <m:nor/>
-                            </m:rPr>
-                            <a:rPr lang="en-US" b="0" i="0" smtClean="0">
-                              <a:latin typeface="Cambria Math"/>
-                            </a:rPr>
-                            <m:t> of successes in sample</m:t>
+                            <m:t>number of successes in sample</m:t>
                           </m:r>
                         </m:num>
                         <m:den>
@@ -32181,16 +31985,7 @@
                             <a:rPr lang="en-US" b="0" i="0" smtClean="0">
                               <a:latin typeface="Cambria Math"/>
                             </a:rPr>
-                            <m:t>sampl</m:t>
-                          </m:r>
-                          <m:r>
-                            <m:rPr>
-                              <m:nor/>
-                            </m:rPr>
-                            <a:rPr lang="en-US" b="0" i="0" smtClean="0">
-                              <a:latin typeface="Cambria Math"/>
-                            </a:rPr>
-                            <m:t>e size</m:t>
+                            <m:t>sample size</m:t>
                           </m:r>
                         </m:den>
                       </m:f>
@@ -32202,7 +31997,7 @@
             </p:txBody>
           </p:sp>
         </mc:Choice>
-        <mc:Fallback>
+        <mc:Fallback xmlns="">
           <p:sp>
             <p:nvSpPr>
               <p:cNvPr id="4" name="TextBox 3"/>
@@ -35095,8 +34890,8 @@
           </a:p>
         </p:txBody>
       </p:sp>
-      <mc:AlternateContent xmlns:mc="http://schemas.openxmlformats.org/markup-compatibility/2006">
-        <mc:Choice xmlns:a14="http://schemas.microsoft.com/office/drawing/2010/main" Requires="a14">
+      <mc:AlternateContent xmlns:mc="http://schemas.openxmlformats.org/markup-compatibility/2006" xmlns:a14="http://schemas.microsoft.com/office/drawing/2010/main">
+        <mc:Choice Requires="a14">
           <p:sp>
             <p:nvSpPr>
               <p:cNvPr id="25" name="TextBox 24"/>
@@ -35643,7 +35438,7 @@
             </p:txBody>
           </p:sp>
         </mc:Choice>
-        <mc:Fallback>
+        <mc:Fallback xmlns="">
           <p:sp>
             <p:nvSpPr>
               <p:cNvPr id="25" name="TextBox 24"/>

--- a/attach/UWM/UWM_PH702_2026Fall_Part05.pptx
+++ b/attach/UWM/UWM_PH702_2026Fall_Part05.pptx
@@ -1131,7 +1131,7 @@
               <a:pPr>
                 <a:defRPr/>
               </a:pPr>
-              <a:t>10/15/2026</a:t>
+              <a:t>10/19/2026</a:t>
             </a:fld>
             <a:endParaRPr lang="en-US" altLang="en-US"/>
           </a:p>
@@ -1346,7 +1346,7 @@
               <a:pPr>
                 <a:defRPr/>
               </a:pPr>
-              <a:t>10/15/2026</a:t>
+              <a:t>10/19/2026</a:t>
             </a:fld>
             <a:endParaRPr lang="en-US" altLang="en-US"/>
           </a:p>
@@ -24989,7 +24989,7 @@
         </p:nvSpPr>
         <p:spPr bwMode="auto">
           <a:xfrm>
-            <a:off x="499270" y="4695121"/>
+            <a:off x="499270" y="4448938"/>
             <a:ext cx="8010524" cy="646113"/>
           </a:xfrm>
           <a:prstGeom prst="rect">
@@ -25191,8 +25191,8 @@
         </p:nvSpPr>
         <p:spPr bwMode="auto">
           <a:xfrm>
-            <a:off x="2035068" y="2847088"/>
-            <a:ext cx="4418720" cy="1785104"/>
+            <a:off x="2035069" y="2847087"/>
+            <a:ext cx="4107824" cy="1454335"/>
           </a:xfrm>
           <a:prstGeom prst="rect">
             <a:avLst/>
@@ -25411,7 +25411,7 @@
               <a:defRPr/>
             </a:pPr>
             <a:r>
-              <a:rPr lang="en-US" altLang="en-US" dirty="0">
+              <a:rPr lang="en-US" altLang="en-US" sz="1400" dirty="0">
                 <a:solidFill>
                   <a:srgbClr val="000000"/>
                 </a:solidFill>
@@ -25434,7 +25434,7 @@
               <a:defRPr/>
             </a:pPr>
             <a:r>
-              <a:rPr lang="en-US" altLang="en-US" dirty="0">
+              <a:rPr lang="en-US" altLang="en-US" sz="1400" dirty="0">
                 <a:solidFill>
                   <a:srgbClr val="000000"/>
                 </a:solidFill>
@@ -25457,7 +25457,7 @@
               <a:defRPr/>
             </a:pPr>
             <a:r>
-              <a:rPr lang="en-US" altLang="en-US" dirty="0">
+              <a:rPr lang="en-US" altLang="en-US" sz="1400" dirty="0">
                 <a:solidFill>
                   <a:srgbClr val="000000"/>
                 </a:solidFill>
@@ -25480,7 +25480,637 @@
               <a:defRPr/>
             </a:pPr>
             <a:r>
-              <a:rPr lang="en-US" altLang="en-US" dirty="0">
+              <a:rPr lang="en-US" altLang="en-US" sz="1400" dirty="0">
+                <a:solidFill>
+                  <a:srgbClr val="000000"/>
+                </a:solidFill>
+              </a:rPr>
+              <a:t>run;</a:t>
+            </a:r>
+          </a:p>
+        </p:txBody>
+      </p:sp>
+      <p:sp>
+        <p:nvSpPr>
+          <p:cNvPr id="3" name="TextBox 2">
+            <a:extLst>
+              <a:ext uri="{FF2B5EF4-FFF2-40B4-BE49-F238E27FC236}">
+                <a16:creationId xmlns:a16="http://schemas.microsoft.com/office/drawing/2014/main" id="{D67CC567-9695-9C0F-CF26-80BD64D6DE9E}"/>
+              </a:ext>
+            </a:extLst>
+          </p:cNvPr>
+          <p:cNvSpPr txBox="1">
+            <a:spLocks noChangeArrowheads="1"/>
+          </p:cNvSpPr>
+          <p:nvPr/>
+        </p:nvSpPr>
+        <p:spPr bwMode="auto">
+          <a:xfrm>
+            <a:off x="1032975" y="5098131"/>
+            <a:ext cx="3381068" cy="1631216"/>
+          </a:xfrm>
+          <a:prstGeom prst="rect">
+            <a:avLst/>
+          </a:prstGeom>
+          <a:solidFill>
+            <a:srgbClr val="EAEDCB"/>
+          </a:solidFill>
+          <a:ln w="10000">
+            <a:solidFill>
+              <a:srgbClr val="D2DA7A"/>
+            </a:solidFill>
+            <a:miter lim="800000"/>
+            <a:headEnd/>
+            <a:tailEnd/>
+          </a:ln>
+          <a:effectLst>
+            <a:outerShdw blurRad="38100" dist="30000" dir="5400000" rotWithShape="0">
+              <a:srgbClr val="808080">
+                <a:alpha val="45000"/>
+              </a:srgbClr>
+            </a:outerShdw>
+          </a:effectLst>
+        </p:spPr>
+        <p:txBody>
+          <a:bodyPr wrap="square">
+            <a:spAutoFit/>
+          </a:bodyPr>
+          <a:lstStyle>
+            <a:lvl1pPr>
+              <a:spcBef>
+                <a:spcPts val="1800"/>
+              </a:spcBef>
+              <a:buClr>
+                <a:schemeClr val="accent1"/>
+              </a:buClr>
+              <a:buSzPct val="100000"/>
+              <a:buFont typeface="Wingdings 2" panose="05020102010507070707" pitchFamily="18" charset="2"/>
+              <a:buChar char="¡"/>
+              <a:defRPr sz="2000">
+                <a:solidFill>
+                  <a:schemeClr val="tx2"/>
+                </a:solidFill>
+                <a:latin typeface="Arial" panose="020B0604020202020204" pitchFamily="34" charset="0"/>
+                <a:ea typeface="ＭＳ Ｐゴシック" panose="020B0600070205080204" pitchFamily="34" charset="-128"/>
+              </a:defRPr>
+            </a:lvl1pPr>
+            <a:lvl2pPr marL="742950" indent="-285750">
+              <a:spcBef>
+                <a:spcPts val="600"/>
+              </a:spcBef>
+              <a:buClr>
+                <a:srgbClr val="031B3C"/>
+              </a:buClr>
+              <a:buSzPct val="100000"/>
+              <a:buFont typeface="Wingdings 2" panose="05020102010507070707" pitchFamily="18" charset="2"/>
+              <a:buChar char="¡"/>
+              <a:defRPr>
+                <a:solidFill>
+                  <a:schemeClr val="tx2"/>
+                </a:solidFill>
+                <a:latin typeface="Arial" panose="020B0604020202020204" pitchFamily="34" charset="0"/>
+                <a:ea typeface="ＭＳ Ｐゴシック" panose="020B0600070205080204" pitchFamily="34" charset="-128"/>
+              </a:defRPr>
+            </a:lvl2pPr>
+            <a:lvl3pPr marL="1143000" indent="-228600">
+              <a:spcBef>
+                <a:spcPts val="600"/>
+              </a:spcBef>
+              <a:buClr>
+                <a:schemeClr val="accent1"/>
+              </a:buClr>
+              <a:buSzPct val="100000"/>
+              <a:buFont typeface="Wingdings 2" panose="05020102010507070707" pitchFamily="18" charset="2"/>
+              <a:buChar char="¡"/>
+              <a:defRPr>
+                <a:solidFill>
+                  <a:schemeClr val="tx2"/>
+                </a:solidFill>
+                <a:latin typeface="Arial" panose="020B0604020202020204" pitchFamily="34" charset="0"/>
+                <a:ea typeface="ＭＳ Ｐゴシック" panose="020B0600070205080204" pitchFamily="34" charset="-128"/>
+              </a:defRPr>
+            </a:lvl3pPr>
+            <a:lvl4pPr marL="1600200" indent="-228600">
+              <a:spcBef>
+                <a:spcPts val="600"/>
+              </a:spcBef>
+              <a:buClr>
+                <a:srgbClr val="031B3C"/>
+              </a:buClr>
+              <a:buSzPct val="100000"/>
+              <a:buFont typeface="Wingdings 2" panose="05020102010507070707" pitchFamily="18" charset="2"/>
+              <a:buChar char="¡"/>
+              <a:defRPr>
+                <a:solidFill>
+                  <a:schemeClr val="tx2"/>
+                </a:solidFill>
+                <a:latin typeface="Arial" panose="020B0604020202020204" pitchFamily="34" charset="0"/>
+                <a:ea typeface="ＭＳ Ｐゴシック" panose="020B0600070205080204" pitchFamily="34" charset="-128"/>
+              </a:defRPr>
+            </a:lvl4pPr>
+            <a:lvl5pPr marL="2057400" indent="-228600">
+              <a:spcBef>
+                <a:spcPts val="600"/>
+              </a:spcBef>
+              <a:buClr>
+                <a:schemeClr val="accent1"/>
+              </a:buClr>
+              <a:buSzPct val="100000"/>
+              <a:buFont typeface="Wingdings 2" panose="05020102010507070707" pitchFamily="18" charset="2"/>
+              <a:buChar char="¡"/>
+              <a:defRPr>
+                <a:solidFill>
+                  <a:schemeClr val="tx2"/>
+                </a:solidFill>
+                <a:latin typeface="Arial" panose="020B0604020202020204" pitchFamily="34" charset="0"/>
+                <a:ea typeface="ＭＳ Ｐゴシック" panose="020B0600070205080204" pitchFamily="34" charset="-128"/>
+              </a:defRPr>
+            </a:lvl5pPr>
+            <a:lvl6pPr marL="2514600" indent="-228600" defTabSz="457200" eaLnBrk="0" fontAlgn="base" hangingPunct="0">
+              <a:spcBef>
+                <a:spcPts val="600"/>
+              </a:spcBef>
+              <a:spcAft>
+                <a:spcPct val="0"/>
+              </a:spcAft>
+              <a:buClr>
+                <a:schemeClr val="accent1"/>
+              </a:buClr>
+              <a:buSzPct val="100000"/>
+              <a:buFont typeface="Wingdings 2" panose="05020102010507070707" pitchFamily="18" charset="2"/>
+              <a:buChar char="¡"/>
+              <a:defRPr>
+                <a:solidFill>
+                  <a:schemeClr val="tx2"/>
+                </a:solidFill>
+                <a:latin typeface="Arial" panose="020B0604020202020204" pitchFamily="34" charset="0"/>
+                <a:ea typeface="ＭＳ Ｐゴシック" panose="020B0600070205080204" pitchFamily="34" charset="-128"/>
+              </a:defRPr>
+            </a:lvl6pPr>
+            <a:lvl7pPr marL="2971800" indent="-228600" defTabSz="457200" eaLnBrk="0" fontAlgn="base" hangingPunct="0">
+              <a:spcBef>
+                <a:spcPts val="600"/>
+              </a:spcBef>
+              <a:spcAft>
+                <a:spcPct val="0"/>
+              </a:spcAft>
+              <a:buClr>
+                <a:schemeClr val="accent1"/>
+              </a:buClr>
+              <a:buSzPct val="100000"/>
+              <a:buFont typeface="Wingdings 2" panose="05020102010507070707" pitchFamily="18" charset="2"/>
+              <a:buChar char="¡"/>
+              <a:defRPr>
+                <a:solidFill>
+                  <a:schemeClr val="tx2"/>
+                </a:solidFill>
+                <a:latin typeface="Arial" panose="020B0604020202020204" pitchFamily="34" charset="0"/>
+                <a:ea typeface="ＭＳ Ｐゴシック" panose="020B0600070205080204" pitchFamily="34" charset="-128"/>
+              </a:defRPr>
+            </a:lvl7pPr>
+            <a:lvl8pPr marL="3429000" indent="-228600" defTabSz="457200" eaLnBrk="0" fontAlgn="base" hangingPunct="0">
+              <a:spcBef>
+                <a:spcPts val="600"/>
+              </a:spcBef>
+              <a:spcAft>
+                <a:spcPct val="0"/>
+              </a:spcAft>
+              <a:buClr>
+                <a:schemeClr val="accent1"/>
+              </a:buClr>
+              <a:buSzPct val="100000"/>
+              <a:buFont typeface="Wingdings 2" panose="05020102010507070707" pitchFamily="18" charset="2"/>
+              <a:buChar char="¡"/>
+              <a:defRPr>
+                <a:solidFill>
+                  <a:schemeClr val="tx2"/>
+                </a:solidFill>
+                <a:latin typeface="Arial" panose="020B0604020202020204" pitchFamily="34" charset="0"/>
+                <a:ea typeface="ＭＳ Ｐゴシック" panose="020B0600070205080204" pitchFamily="34" charset="-128"/>
+              </a:defRPr>
+            </a:lvl8pPr>
+            <a:lvl9pPr marL="3886200" indent="-228600" defTabSz="457200" eaLnBrk="0" fontAlgn="base" hangingPunct="0">
+              <a:spcBef>
+                <a:spcPts val="600"/>
+              </a:spcBef>
+              <a:spcAft>
+                <a:spcPct val="0"/>
+              </a:spcAft>
+              <a:buClr>
+                <a:schemeClr val="accent1"/>
+              </a:buClr>
+              <a:buSzPct val="100000"/>
+              <a:buFont typeface="Wingdings 2" panose="05020102010507070707" pitchFamily="18" charset="2"/>
+              <a:buChar char="¡"/>
+              <a:defRPr>
+                <a:solidFill>
+                  <a:schemeClr val="tx2"/>
+                </a:solidFill>
+                <a:latin typeface="Arial" panose="020B0604020202020204" pitchFamily="34" charset="0"/>
+                <a:ea typeface="ＭＳ Ｐゴシック" panose="020B0600070205080204" pitchFamily="34" charset="-128"/>
+              </a:defRPr>
+            </a:lvl9pPr>
+          </a:lstStyle>
+          <a:p>
+            <a:pPr eaLnBrk="1" hangingPunct="1">
+              <a:spcBef>
+                <a:spcPct val="0"/>
+              </a:spcBef>
+              <a:spcAft>
+                <a:spcPts val="1200"/>
+              </a:spcAft>
+              <a:buClrTx/>
+              <a:buSzTx/>
+              <a:buFontTx/>
+              <a:buNone/>
+              <a:defRPr/>
+            </a:pPr>
+            <a:r>
+              <a:rPr lang="en-US" altLang="en-US" sz="1400" dirty="0">
+                <a:solidFill>
+                  <a:srgbClr val="000000"/>
+                </a:solidFill>
+              </a:rPr>
+              <a:t>data binomial;</a:t>
+            </a:r>
+          </a:p>
+          <a:p>
+            <a:pPr eaLnBrk="1" hangingPunct="1">
+              <a:spcBef>
+                <a:spcPct val="0"/>
+              </a:spcBef>
+              <a:spcAft>
+                <a:spcPts val="1200"/>
+              </a:spcAft>
+              <a:buClrTx/>
+              <a:buSzTx/>
+              <a:buFontTx/>
+              <a:buNone/>
+              <a:defRPr/>
+            </a:pPr>
+            <a:r>
+              <a:rPr lang="en-US" altLang="en-US" sz="1400" dirty="0">
+                <a:solidFill>
+                  <a:srgbClr val="000000"/>
+                </a:solidFill>
+              </a:rPr>
+              <a:t>    prob = pdf('BINOMIAL’, 4, 0.25, 5) + pdf('BINOMIAL’, 5, 0.25, 5);</a:t>
+            </a:r>
+          </a:p>
+          <a:p>
+            <a:pPr eaLnBrk="1" hangingPunct="1">
+              <a:spcBef>
+                <a:spcPct val="0"/>
+              </a:spcBef>
+              <a:spcAft>
+                <a:spcPts val="1200"/>
+              </a:spcAft>
+              <a:buClrTx/>
+              <a:buSzTx/>
+              <a:buFontTx/>
+              <a:buNone/>
+              <a:defRPr/>
+            </a:pPr>
+            <a:r>
+              <a:rPr lang="en-US" altLang="en-US" sz="1400" dirty="0">
+                <a:solidFill>
+                  <a:srgbClr val="000000"/>
+                </a:solidFill>
+              </a:rPr>
+              <a:t>    proc print;</a:t>
+            </a:r>
+          </a:p>
+          <a:p>
+            <a:pPr eaLnBrk="1" hangingPunct="1">
+              <a:spcBef>
+                <a:spcPct val="0"/>
+              </a:spcBef>
+              <a:spcAft>
+                <a:spcPts val="1200"/>
+              </a:spcAft>
+              <a:buClrTx/>
+              <a:buSzTx/>
+              <a:buFontTx/>
+              <a:buNone/>
+              <a:defRPr/>
+            </a:pPr>
+            <a:r>
+              <a:rPr lang="en-US" altLang="en-US" sz="1400" dirty="0">
+                <a:solidFill>
+                  <a:srgbClr val="000000"/>
+                </a:solidFill>
+              </a:rPr>
+              <a:t>run;</a:t>
+            </a:r>
+          </a:p>
+        </p:txBody>
+      </p:sp>
+      <p:sp>
+        <p:nvSpPr>
+          <p:cNvPr id="4" name="TextBox 3">
+            <a:extLst>
+              <a:ext uri="{FF2B5EF4-FFF2-40B4-BE49-F238E27FC236}">
+                <a16:creationId xmlns:a16="http://schemas.microsoft.com/office/drawing/2014/main" id="{C3565214-7E9B-C661-CA22-5158F2244220}"/>
+              </a:ext>
+            </a:extLst>
+          </p:cNvPr>
+          <p:cNvSpPr txBox="1">
+            <a:spLocks noChangeArrowheads="1"/>
+          </p:cNvSpPr>
+          <p:nvPr/>
+        </p:nvSpPr>
+        <p:spPr bwMode="auto">
+          <a:xfrm>
+            <a:off x="4565957" y="5098131"/>
+            <a:ext cx="3381068" cy="1415772"/>
+          </a:xfrm>
+          <a:prstGeom prst="rect">
+            <a:avLst/>
+          </a:prstGeom>
+          <a:solidFill>
+            <a:srgbClr val="EAEDCB"/>
+          </a:solidFill>
+          <a:ln w="10000">
+            <a:solidFill>
+              <a:srgbClr val="D2DA7A"/>
+            </a:solidFill>
+            <a:miter lim="800000"/>
+            <a:headEnd/>
+            <a:tailEnd/>
+          </a:ln>
+          <a:effectLst>
+            <a:outerShdw blurRad="38100" dist="30000" dir="5400000" rotWithShape="0">
+              <a:srgbClr val="808080">
+                <a:alpha val="45000"/>
+              </a:srgbClr>
+            </a:outerShdw>
+          </a:effectLst>
+        </p:spPr>
+        <p:txBody>
+          <a:bodyPr wrap="square">
+            <a:spAutoFit/>
+          </a:bodyPr>
+          <a:lstStyle>
+            <a:lvl1pPr>
+              <a:spcBef>
+                <a:spcPts val="1800"/>
+              </a:spcBef>
+              <a:buClr>
+                <a:schemeClr val="accent1"/>
+              </a:buClr>
+              <a:buSzPct val="100000"/>
+              <a:buFont typeface="Wingdings 2" panose="05020102010507070707" pitchFamily="18" charset="2"/>
+              <a:buChar char="¡"/>
+              <a:defRPr sz="2000">
+                <a:solidFill>
+                  <a:schemeClr val="tx2"/>
+                </a:solidFill>
+                <a:latin typeface="Arial" panose="020B0604020202020204" pitchFamily="34" charset="0"/>
+                <a:ea typeface="ＭＳ Ｐゴシック" panose="020B0600070205080204" pitchFamily="34" charset="-128"/>
+              </a:defRPr>
+            </a:lvl1pPr>
+            <a:lvl2pPr marL="742950" indent="-285750">
+              <a:spcBef>
+                <a:spcPts val="600"/>
+              </a:spcBef>
+              <a:buClr>
+                <a:srgbClr val="031B3C"/>
+              </a:buClr>
+              <a:buSzPct val="100000"/>
+              <a:buFont typeface="Wingdings 2" panose="05020102010507070707" pitchFamily="18" charset="2"/>
+              <a:buChar char="¡"/>
+              <a:defRPr>
+                <a:solidFill>
+                  <a:schemeClr val="tx2"/>
+                </a:solidFill>
+                <a:latin typeface="Arial" panose="020B0604020202020204" pitchFamily="34" charset="0"/>
+                <a:ea typeface="ＭＳ Ｐゴシック" panose="020B0600070205080204" pitchFamily="34" charset="-128"/>
+              </a:defRPr>
+            </a:lvl2pPr>
+            <a:lvl3pPr marL="1143000" indent="-228600">
+              <a:spcBef>
+                <a:spcPts val="600"/>
+              </a:spcBef>
+              <a:buClr>
+                <a:schemeClr val="accent1"/>
+              </a:buClr>
+              <a:buSzPct val="100000"/>
+              <a:buFont typeface="Wingdings 2" panose="05020102010507070707" pitchFamily="18" charset="2"/>
+              <a:buChar char="¡"/>
+              <a:defRPr>
+                <a:solidFill>
+                  <a:schemeClr val="tx2"/>
+                </a:solidFill>
+                <a:latin typeface="Arial" panose="020B0604020202020204" pitchFamily="34" charset="0"/>
+                <a:ea typeface="ＭＳ Ｐゴシック" panose="020B0600070205080204" pitchFamily="34" charset="-128"/>
+              </a:defRPr>
+            </a:lvl3pPr>
+            <a:lvl4pPr marL="1600200" indent="-228600">
+              <a:spcBef>
+                <a:spcPts val="600"/>
+              </a:spcBef>
+              <a:buClr>
+                <a:srgbClr val="031B3C"/>
+              </a:buClr>
+              <a:buSzPct val="100000"/>
+              <a:buFont typeface="Wingdings 2" panose="05020102010507070707" pitchFamily="18" charset="2"/>
+              <a:buChar char="¡"/>
+              <a:defRPr>
+                <a:solidFill>
+                  <a:schemeClr val="tx2"/>
+                </a:solidFill>
+                <a:latin typeface="Arial" panose="020B0604020202020204" pitchFamily="34" charset="0"/>
+                <a:ea typeface="ＭＳ Ｐゴシック" panose="020B0600070205080204" pitchFamily="34" charset="-128"/>
+              </a:defRPr>
+            </a:lvl4pPr>
+            <a:lvl5pPr marL="2057400" indent="-228600">
+              <a:spcBef>
+                <a:spcPts val="600"/>
+              </a:spcBef>
+              <a:buClr>
+                <a:schemeClr val="accent1"/>
+              </a:buClr>
+              <a:buSzPct val="100000"/>
+              <a:buFont typeface="Wingdings 2" panose="05020102010507070707" pitchFamily="18" charset="2"/>
+              <a:buChar char="¡"/>
+              <a:defRPr>
+                <a:solidFill>
+                  <a:schemeClr val="tx2"/>
+                </a:solidFill>
+                <a:latin typeface="Arial" panose="020B0604020202020204" pitchFamily="34" charset="0"/>
+                <a:ea typeface="ＭＳ Ｐゴシック" panose="020B0600070205080204" pitchFamily="34" charset="-128"/>
+              </a:defRPr>
+            </a:lvl5pPr>
+            <a:lvl6pPr marL="2514600" indent="-228600" defTabSz="457200" eaLnBrk="0" fontAlgn="base" hangingPunct="0">
+              <a:spcBef>
+                <a:spcPts val="600"/>
+              </a:spcBef>
+              <a:spcAft>
+                <a:spcPct val="0"/>
+              </a:spcAft>
+              <a:buClr>
+                <a:schemeClr val="accent1"/>
+              </a:buClr>
+              <a:buSzPct val="100000"/>
+              <a:buFont typeface="Wingdings 2" panose="05020102010507070707" pitchFamily="18" charset="2"/>
+              <a:buChar char="¡"/>
+              <a:defRPr>
+                <a:solidFill>
+                  <a:schemeClr val="tx2"/>
+                </a:solidFill>
+                <a:latin typeface="Arial" panose="020B0604020202020204" pitchFamily="34" charset="0"/>
+                <a:ea typeface="ＭＳ Ｐゴシック" panose="020B0600070205080204" pitchFamily="34" charset="-128"/>
+              </a:defRPr>
+            </a:lvl6pPr>
+            <a:lvl7pPr marL="2971800" indent="-228600" defTabSz="457200" eaLnBrk="0" fontAlgn="base" hangingPunct="0">
+              <a:spcBef>
+                <a:spcPts val="600"/>
+              </a:spcBef>
+              <a:spcAft>
+                <a:spcPct val="0"/>
+              </a:spcAft>
+              <a:buClr>
+                <a:schemeClr val="accent1"/>
+              </a:buClr>
+              <a:buSzPct val="100000"/>
+              <a:buFont typeface="Wingdings 2" panose="05020102010507070707" pitchFamily="18" charset="2"/>
+              <a:buChar char="¡"/>
+              <a:defRPr>
+                <a:solidFill>
+                  <a:schemeClr val="tx2"/>
+                </a:solidFill>
+                <a:latin typeface="Arial" panose="020B0604020202020204" pitchFamily="34" charset="0"/>
+                <a:ea typeface="ＭＳ Ｐゴシック" panose="020B0600070205080204" pitchFamily="34" charset="-128"/>
+              </a:defRPr>
+            </a:lvl7pPr>
+            <a:lvl8pPr marL="3429000" indent="-228600" defTabSz="457200" eaLnBrk="0" fontAlgn="base" hangingPunct="0">
+              <a:spcBef>
+                <a:spcPts val="600"/>
+              </a:spcBef>
+              <a:spcAft>
+                <a:spcPct val="0"/>
+              </a:spcAft>
+              <a:buClr>
+                <a:schemeClr val="accent1"/>
+              </a:buClr>
+              <a:buSzPct val="100000"/>
+              <a:buFont typeface="Wingdings 2" panose="05020102010507070707" pitchFamily="18" charset="2"/>
+              <a:buChar char="¡"/>
+              <a:defRPr>
+                <a:solidFill>
+                  <a:schemeClr val="tx2"/>
+                </a:solidFill>
+                <a:latin typeface="Arial" panose="020B0604020202020204" pitchFamily="34" charset="0"/>
+                <a:ea typeface="ＭＳ Ｐゴシック" panose="020B0600070205080204" pitchFamily="34" charset="-128"/>
+              </a:defRPr>
+            </a:lvl8pPr>
+            <a:lvl9pPr marL="3886200" indent="-228600" defTabSz="457200" eaLnBrk="0" fontAlgn="base" hangingPunct="0">
+              <a:spcBef>
+                <a:spcPts val="600"/>
+              </a:spcBef>
+              <a:spcAft>
+                <a:spcPct val="0"/>
+              </a:spcAft>
+              <a:buClr>
+                <a:schemeClr val="accent1"/>
+              </a:buClr>
+              <a:buSzPct val="100000"/>
+              <a:buFont typeface="Wingdings 2" panose="05020102010507070707" pitchFamily="18" charset="2"/>
+              <a:buChar char="¡"/>
+              <a:defRPr>
+                <a:solidFill>
+                  <a:schemeClr val="tx2"/>
+                </a:solidFill>
+                <a:latin typeface="Arial" panose="020B0604020202020204" pitchFamily="34" charset="0"/>
+                <a:ea typeface="ＭＳ Ｐゴシック" panose="020B0600070205080204" pitchFamily="34" charset="-128"/>
+              </a:defRPr>
+            </a:lvl9pPr>
+          </a:lstStyle>
+          <a:p>
+            <a:pPr eaLnBrk="1" hangingPunct="1">
+              <a:spcBef>
+                <a:spcPct val="0"/>
+              </a:spcBef>
+              <a:spcAft>
+                <a:spcPts val="1200"/>
+              </a:spcAft>
+              <a:buClrTx/>
+              <a:buSzTx/>
+              <a:buFontTx/>
+              <a:buNone/>
+              <a:defRPr/>
+            </a:pPr>
+            <a:r>
+              <a:rPr lang="en-US" altLang="en-US" sz="1400" dirty="0">
+                <a:solidFill>
+                  <a:srgbClr val="000000"/>
+                </a:solidFill>
+              </a:rPr>
+              <a:t>data binomial;</a:t>
+            </a:r>
+          </a:p>
+          <a:p>
+            <a:pPr eaLnBrk="1" hangingPunct="1">
+              <a:spcBef>
+                <a:spcPct val="0"/>
+              </a:spcBef>
+              <a:spcAft>
+                <a:spcPts val="1200"/>
+              </a:spcAft>
+              <a:buClrTx/>
+              <a:buSzTx/>
+              <a:buFontTx/>
+              <a:buNone/>
+              <a:defRPr/>
+            </a:pPr>
+            <a:r>
+              <a:rPr lang="en-US" altLang="en-US" sz="1400" dirty="0">
+                <a:solidFill>
+                  <a:srgbClr val="000000"/>
+                </a:solidFill>
+              </a:rPr>
+              <a:t>    prob = 1-cdf('BINOMIAL’, 3, 0.25, 5);</a:t>
+            </a:r>
+          </a:p>
+          <a:p>
+            <a:pPr eaLnBrk="1" hangingPunct="1">
+              <a:spcBef>
+                <a:spcPct val="0"/>
+              </a:spcBef>
+              <a:spcAft>
+                <a:spcPts val="1200"/>
+              </a:spcAft>
+              <a:buClrTx/>
+              <a:buSzTx/>
+              <a:buFontTx/>
+              <a:buNone/>
+              <a:defRPr/>
+            </a:pPr>
+            <a:r>
+              <a:rPr lang="en-US" altLang="en-US" sz="1400" dirty="0">
+                <a:solidFill>
+                  <a:srgbClr val="000000"/>
+                </a:solidFill>
+              </a:rPr>
+              <a:t>    proc print;</a:t>
+            </a:r>
+          </a:p>
+          <a:p>
+            <a:pPr eaLnBrk="1" hangingPunct="1">
+              <a:spcBef>
+                <a:spcPct val="0"/>
+              </a:spcBef>
+              <a:spcAft>
+                <a:spcPts val="1200"/>
+              </a:spcAft>
+              <a:buClrTx/>
+              <a:buSzTx/>
+              <a:buFontTx/>
+              <a:buNone/>
+              <a:defRPr/>
+            </a:pPr>
+            <a:r>
+              <a:rPr lang="en-US" altLang="en-US" sz="1400" dirty="0">
                 <a:solidFill>
                   <a:srgbClr val="000000"/>
                 </a:solidFill>
@@ -25612,6 +26242,112 @@
                       </p:childTnLst>
                     </p:cTn>
                   </p:par>
+                  <p:par>
+                    <p:cTn id="13" fill="hold">
+                      <p:stCondLst>
+                        <p:cond delay="indefinite"/>
+                      </p:stCondLst>
+                      <p:childTnLst>
+                        <p:par>
+                          <p:cTn id="14" fill="hold">
+                            <p:stCondLst>
+                              <p:cond delay="0"/>
+                            </p:stCondLst>
+                            <p:childTnLst>
+                              <p:par>
+                                <p:cTn id="15" presetID="10" presetClass="entr" presetSubtype="0" fill="hold" grpId="0" nodeType="clickEffect">
+                                  <p:stCondLst>
+                                    <p:cond delay="0"/>
+                                  </p:stCondLst>
+                                  <p:childTnLst>
+                                    <p:set>
+                                      <p:cBhvr>
+                                        <p:cTn id="16" dur="1" fill="hold">
+                                          <p:stCondLst>
+                                            <p:cond delay="0"/>
+                                          </p:stCondLst>
+                                        </p:cTn>
+                                        <p:tgtEl>
+                                          <p:spTgt spid="3"/>
+                                        </p:tgtEl>
+                                        <p:attrNameLst>
+                                          <p:attrName>style.visibility</p:attrName>
+                                        </p:attrNameLst>
+                                      </p:cBhvr>
+                                      <p:to>
+                                        <p:strVal val="visible"/>
+                                      </p:to>
+                                    </p:set>
+                                    <p:animEffect transition="in" filter="fade">
+                                      <p:cBhvr>
+                                        <p:cTn id="17" dur="500"/>
+                                        <p:tgtEl>
+                                          <p:spTgt spid="3"/>
+                                        </p:tgtEl>
+                                      </p:cBhvr>
+                                    </p:animEffect>
+                                  </p:childTnLst>
+                                </p:cTn>
+                              </p:par>
+                            </p:childTnLst>
+                          </p:cTn>
+                        </p:par>
+                      </p:childTnLst>
+                    </p:cTn>
+                  </p:par>
+                  <p:par>
+                    <p:cTn id="18" fill="hold">
+                      <p:stCondLst>
+                        <p:cond delay="indefinite"/>
+                      </p:stCondLst>
+                      <p:childTnLst>
+                        <p:par>
+                          <p:cTn id="19" fill="hold">
+                            <p:stCondLst>
+                              <p:cond delay="0"/>
+                            </p:stCondLst>
+                            <p:childTnLst>
+                              <p:par>
+                                <p:cTn id="20" presetID="10" presetClass="entr" presetSubtype="0" fill="hold" grpId="0" nodeType="clickEffect">
+                                  <p:stCondLst>
+                                    <p:cond delay="0"/>
+                                  </p:stCondLst>
+                                  <p:childTnLst>
+                                    <p:set>
+                                      <p:cBhvr>
+                                        <p:cTn id="21" dur="1" fill="hold">
+                                          <p:stCondLst>
+                                            <p:cond delay="0"/>
+                                          </p:stCondLst>
+                                        </p:cTn>
+                                        <p:tgtEl>
+                                          <p:spTgt spid="4"/>
+                                        </p:tgtEl>
+                                        <p:attrNameLst>
+                                          <p:attrName>style.visibility</p:attrName>
+                                        </p:attrNameLst>
+                                      </p:cBhvr>
+                                      <p:to>
+                                        <p:strVal val="visible"/>
+                                      </p:to>
+                                    </p:set>
+                                    <p:animEffect transition="in" filter="fade">
+                                      <p:cBhvr>
+                                        <p:cTn id="22" dur="500"/>
+                                        <p:tgtEl>
+                                          <p:spTgt spid="4"/>
+                                        </p:tgtEl>
+                                      </p:cBhvr>
+                                    </p:animEffect>
+                                  </p:childTnLst>
+                                </p:cTn>
+                              </p:par>
+                            </p:childTnLst>
+                          </p:cTn>
+                        </p:par>
+                      </p:childTnLst>
+                    </p:cTn>
+                  </p:par>
                 </p:childTnLst>
               </p:cTn>
               <p:prevCondLst>
@@ -25636,6 +26372,8 @@
     <p:bldLst>
       <p:bldP spid="10" grpId="0"/>
       <p:bldP spid="2" grpId="0" animBg="1"/>
+      <p:bldP spid="3" grpId="0" animBg="1"/>
+      <p:bldP spid="4" grpId="0" animBg="1"/>
     </p:bldLst>
   </p:timing>
 </p:sld>
@@ -26737,15 +27475,6 @@
                           <a:latin typeface="Cambria Math" panose="02040503050406030204" pitchFamily="18" charset="0"/>
                         </a:rPr>
                         <m:t>𝜎</m:t>
-                      </m:r>
-                      <m:r>
-                        <a:rPr lang="en-US" altLang="en-US" sz="1800" b="0" i="1" smtClean="0">
-                          <a:solidFill>
-                            <a:srgbClr val="000000"/>
-                          </a:solidFill>
-                          <a:latin typeface="Cambria Math" panose="02040503050406030204" pitchFamily="18" charset="0"/>
-                        </a:rPr>
-                        <m:t>𝑥</m:t>
                       </m:r>
                       <m:r>
                         <a:rPr lang="en-US" altLang="en-US" sz="1800" b="0" i="1" smtClean="0">
@@ -35547,7 +36276,7 @@
         </p:nvSpPr>
         <p:spPr bwMode="auto">
           <a:xfrm>
-            <a:off x="407987" y="3693863"/>
+            <a:off x="407987" y="3633289"/>
             <a:ext cx="8355013" cy="1477962"/>
           </a:xfrm>
           <a:prstGeom prst="rect">
@@ -35715,8 +36444,8 @@
         </p:nvSpPr>
         <p:spPr>
           <a:xfrm>
-            <a:off x="6311835" y="5348885"/>
-            <a:ext cx="2265542" cy="1323439"/>
+            <a:off x="6894241" y="5206431"/>
+            <a:ext cx="1868759" cy="1569660"/>
           </a:xfrm>
           <a:prstGeom prst="rect">
             <a:avLst/>
@@ -35743,7 +36472,7 @@
           </a:fontRef>
         </p:style>
         <p:txBody>
-          <a:bodyPr>
+          <a:bodyPr wrap="square">
             <a:spAutoFit/>
           </a:bodyPr>
           <a:lstStyle>
@@ -35885,8 +36614,8 @@
         </p:nvSpPr>
         <p:spPr bwMode="auto">
           <a:xfrm>
-            <a:off x="1163923" y="5259154"/>
-            <a:ext cx="3254170" cy="1538883"/>
+            <a:off x="407987" y="5226251"/>
+            <a:ext cx="2760726" cy="1415772"/>
           </a:xfrm>
           <a:prstGeom prst="rect">
             <a:avLst/>
@@ -36105,7 +36834,7 @@
               <a:defRPr/>
             </a:pPr>
             <a:r>
-              <a:rPr lang="en-US" altLang="en-US" sz="1600" dirty="0">
+              <a:rPr lang="en-US" altLang="en-US" sz="1400" dirty="0">
                 <a:solidFill>
                   <a:srgbClr val="000000"/>
                 </a:solidFill>
@@ -36113,7 +36842,7 @@
               <a:t>data </a:t>
             </a:r>
             <a:r>
-              <a:rPr lang="en-US" altLang="en-US" sz="1600" dirty="0" err="1">
+              <a:rPr lang="en-US" altLang="en-US" sz="1400" dirty="0" err="1">
                 <a:solidFill>
                   <a:srgbClr val="000000"/>
                 </a:solidFill>
@@ -36121,7 +36850,7 @@
               <a:t>poisson</a:t>
             </a:r>
             <a:r>
-              <a:rPr lang="en-US" altLang="en-US" sz="1600" dirty="0">
+              <a:rPr lang="en-US" altLang="en-US" sz="1400" dirty="0">
                 <a:solidFill>
                   <a:srgbClr val="000000"/>
                 </a:solidFill>
@@ -36144,7 +36873,7 @@
               <a:defRPr/>
             </a:pPr>
             <a:r>
-              <a:rPr lang="en-US" altLang="en-US" sz="1600" dirty="0">
+              <a:rPr lang="en-US" altLang="en-US" sz="1400" dirty="0">
                 <a:solidFill>
                   <a:srgbClr val="000000"/>
                 </a:solidFill>
@@ -36152,7 +36881,7 @@
               <a:t>    prob = </a:t>
             </a:r>
             <a:r>
-              <a:rPr lang="en-US" altLang="en-US" sz="1600" dirty="0" err="1">
+              <a:rPr lang="en-US" altLang="en-US" sz="1400" dirty="0" err="1">
                 <a:solidFill>
                   <a:srgbClr val="000000"/>
                 </a:solidFill>
@@ -36160,7 +36889,7 @@
               <a:t>cdf</a:t>
             </a:r>
             <a:r>
-              <a:rPr lang="en-US" altLang="en-US" sz="1600" dirty="0">
+              <a:rPr lang="en-US" altLang="en-US" sz="1400" dirty="0">
                 <a:solidFill>
                   <a:srgbClr val="000000"/>
                 </a:solidFill>
@@ -36183,7 +36912,7 @@
               <a:defRPr/>
             </a:pPr>
             <a:r>
-              <a:rPr lang="en-US" altLang="en-US" sz="1600" dirty="0">
+              <a:rPr lang="en-US" altLang="en-US" sz="1400" dirty="0">
                 <a:solidFill>
                   <a:srgbClr val="000000"/>
                 </a:solidFill>
@@ -36206,7 +36935,338 @@
               <a:defRPr/>
             </a:pPr>
             <a:r>
-              <a:rPr lang="en-US" altLang="en-US" sz="1600" dirty="0">
+              <a:rPr lang="en-US" altLang="en-US" sz="1400" dirty="0">
+                <a:solidFill>
+                  <a:srgbClr val="000000"/>
+                </a:solidFill>
+              </a:rPr>
+              <a:t>run;</a:t>
+            </a:r>
+          </a:p>
+        </p:txBody>
+      </p:sp>
+      <p:sp>
+        <p:nvSpPr>
+          <p:cNvPr id="4" name="TextBox 3">
+            <a:extLst>
+              <a:ext uri="{FF2B5EF4-FFF2-40B4-BE49-F238E27FC236}">
+                <a16:creationId xmlns:a16="http://schemas.microsoft.com/office/drawing/2014/main" id="{828D6DE0-9D52-F336-1259-6EEF61FFCDEE}"/>
+              </a:ext>
+            </a:extLst>
+          </p:cNvPr>
+          <p:cNvSpPr txBox="1">
+            <a:spLocks noChangeArrowheads="1"/>
+          </p:cNvSpPr>
+          <p:nvPr/>
+        </p:nvSpPr>
+        <p:spPr bwMode="auto">
+          <a:xfrm>
+            <a:off x="3558331" y="5160264"/>
+            <a:ext cx="2643293" cy="1661993"/>
+          </a:xfrm>
+          <a:prstGeom prst="rect">
+            <a:avLst/>
+          </a:prstGeom>
+          <a:solidFill>
+            <a:srgbClr val="EAEDCB"/>
+          </a:solidFill>
+          <a:ln w="10000">
+            <a:solidFill>
+              <a:srgbClr val="D2DA7A"/>
+            </a:solidFill>
+            <a:miter lim="800000"/>
+            <a:headEnd/>
+            <a:tailEnd/>
+          </a:ln>
+          <a:effectLst>
+            <a:outerShdw blurRad="38100" dist="30000" dir="5400000" rotWithShape="0">
+              <a:srgbClr val="808080">
+                <a:alpha val="45000"/>
+              </a:srgbClr>
+            </a:outerShdw>
+          </a:effectLst>
+        </p:spPr>
+        <p:txBody>
+          <a:bodyPr wrap="square">
+            <a:spAutoFit/>
+          </a:bodyPr>
+          <a:lstStyle>
+            <a:lvl1pPr>
+              <a:spcBef>
+                <a:spcPts val="1800"/>
+              </a:spcBef>
+              <a:buClr>
+                <a:schemeClr val="accent1"/>
+              </a:buClr>
+              <a:buSzPct val="100000"/>
+              <a:buFont typeface="Wingdings 2" panose="05020102010507070707" pitchFamily="18" charset="2"/>
+              <a:buChar char="¡"/>
+              <a:defRPr sz="2000">
+                <a:solidFill>
+                  <a:schemeClr val="tx2"/>
+                </a:solidFill>
+                <a:latin typeface="Arial" panose="020B0604020202020204" pitchFamily="34" charset="0"/>
+                <a:ea typeface="ＭＳ Ｐゴシック" panose="020B0600070205080204" pitchFamily="34" charset="-128"/>
+              </a:defRPr>
+            </a:lvl1pPr>
+            <a:lvl2pPr marL="742950" indent="-285750">
+              <a:spcBef>
+                <a:spcPts val="600"/>
+              </a:spcBef>
+              <a:buClr>
+                <a:srgbClr val="031B3C"/>
+              </a:buClr>
+              <a:buSzPct val="100000"/>
+              <a:buFont typeface="Wingdings 2" panose="05020102010507070707" pitchFamily="18" charset="2"/>
+              <a:buChar char="¡"/>
+              <a:defRPr>
+                <a:solidFill>
+                  <a:schemeClr val="tx2"/>
+                </a:solidFill>
+                <a:latin typeface="Arial" panose="020B0604020202020204" pitchFamily="34" charset="0"/>
+                <a:ea typeface="ＭＳ Ｐゴシック" panose="020B0600070205080204" pitchFamily="34" charset="-128"/>
+              </a:defRPr>
+            </a:lvl2pPr>
+            <a:lvl3pPr marL="1143000" indent="-228600">
+              <a:spcBef>
+                <a:spcPts val="600"/>
+              </a:spcBef>
+              <a:buClr>
+                <a:schemeClr val="accent1"/>
+              </a:buClr>
+              <a:buSzPct val="100000"/>
+              <a:buFont typeface="Wingdings 2" panose="05020102010507070707" pitchFamily="18" charset="2"/>
+              <a:buChar char="¡"/>
+              <a:defRPr>
+                <a:solidFill>
+                  <a:schemeClr val="tx2"/>
+                </a:solidFill>
+                <a:latin typeface="Arial" panose="020B0604020202020204" pitchFamily="34" charset="0"/>
+                <a:ea typeface="ＭＳ Ｐゴシック" panose="020B0600070205080204" pitchFamily="34" charset="-128"/>
+              </a:defRPr>
+            </a:lvl3pPr>
+            <a:lvl4pPr marL="1600200" indent="-228600">
+              <a:spcBef>
+                <a:spcPts val="600"/>
+              </a:spcBef>
+              <a:buClr>
+                <a:srgbClr val="031B3C"/>
+              </a:buClr>
+              <a:buSzPct val="100000"/>
+              <a:buFont typeface="Wingdings 2" panose="05020102010507070707" pitchFamily="18" charset="2"/>
+              <a:buChar char="¡"/>
+              <a:defRPr>
+                <a:solidFill>
+                  <a:schemeClr val="tx2"/>
+                </a:solidFill>
+                <a:latin typeface="Arial" panose="020B0604020202020204" pitchFamily="34" charset="0"/>
+                <a:ea typeface="ＭＳ Ｐゴシック" panose="020B0600070205080204" pitchFamily="34" charset="-128"/>
+              </a:defRPr>
+            </a:lvl4pPr>
+            <a:lvl5pPr marL="2057400" indent="-228600">
+              <a:spcBef>
+                <a:spcPts val="600"/>
+              </a:spcBef>
+              <a:buClr>
+                <a:schemeClr val="accent1"/>
+              </a:buClr>
+              <a:buSzPct val="100000"/>
+              <a:buFont typeface="Wingdings 2" panose="05020102010507070707" pitchFamily="18" charset="2"/>
+              <a:buChar char="¡"/>
+              <a:defRPr>
+                <a:solidFill>
+                  <a:schemeClr val="tx2"/>
+                </a:solidFill>
+                <a:latin typeface="Arial" panose="020B0604020202020204" pitchFamily="34" charset="0"/>
+                <a:ea typeface="ＭＳ Ｐゴシック" panose="020B0600070205080204" pitchFamily="34" charset="-128"/>
+              </a:defRPr>
+            </a:lvl5pPr>
+            <a:lvl6pPr marL="2514600" indent="-228600" defTabSz="457200" eaLnBrk="0" fontAlgn="base" hangingPunct="0">
+              <a:spcBef>
+                <a:spcPts val="600"/>
+              </a:spcBef>
+              <a:spcAft>
+                <a:spcPct val="0"/>
+              </a:spcAft>
+              <a:buClr>
+                <a:schemeClr val="accent1"/>
+              </a:buClr>
+              <a:buSzPct val="100000"/>
+              <a:buFont typeface="Wingdings 2" panose="05020102010507070707" pitchFamily="18" charset="2"/>
+              <a:buChar char="¡"/>
+              <a:defRPr>
+                <a:solidFill>
+                  <a:schemeClr val="tx2"/>
+                </a:solidFill>
+                <a:latin typeface="Arial" panose="020B0604020202020204" pitchFamily="34" charset="0"/>
+                <a:ea typeface="ＭＳ Ｐゴシック" panose="020B0600070205080204" pitchFamily="34" charset="-128"/>
+              </a:defRPr>
+            </a:lvl6pPr>
+            <a:lvl7pPr marL="2971800" indent="-228600" defTabSz="457200" eaLnBrk="0" fontAlgn="base" hangingPunct="0">
+              <a:spcBef>
+                <a:spcPts val="600"/>
+              </a:spcBef>
+              <a:spcAft>
+                <a:spcPct val="0"/>
+              </a:spcAft>
+              <a:buClr>
+                <a:schemeClr val="accent1"/>
+              </a:buClr>
+              <a:buSzPct val="100000"/>
+              <a:buFont typeface="Wingdings 2" panose="05020102010507070707" pitchFamily="18" charset="2"/>
+              <a:buChar char="¡"/>
+              <a:defRPr>
+                <a:solidFill>
+                  <a:schemeClr val="tx2"/>
+                </a:solidFill>
+                <a:latin typeface="Arial" panose="020B0604020202020204" pitchFamily="34" charset="0"/>
+                <a:ea typeface="ＭＳ Ｐゴシック" panose="020B0600070205080204" pitchFamily="34" charset="-128"/>
+              </a:defRPr>
+            </a:lvl7pPr>
+            <a:lvl8pPr marL="3429000" indent="-228600" defTabSz="457200" eaLnBrk="0" fontAlgn="base" hangingPunct="0">
+              <a:spcBef>
+                <a:spcPts val="600"/>
+              </a:spcBef>
+              <a:spcAft>
+                <a:spcPct val="0"/>
+              </a:spcAft>
+              <a:buClr>
+                <a:schemeClr val="accent1"/>
+              </a:buClr>
+              <a:buSzPct val="100000"/>
+              <a:buFont typeface="Wingdings 2" panose="05020102010507070707" pitchFamily="18" charset="2"/>
+              <a:buChar char="¡"/>
+              <a:defRPr>
+                <a:solidFill>
+                  <a:schemeClr val="tx2"/>
+                </a:solidFill>
+                <a:latin typeface="Arial" panose="020B0604020202020204" pitchFamily="34" charset="0"/>
+                <a:ea typeface="ＭＳ Ｐゴシック" panose="020B0600070205080204" pitchFamily="34" charset="-128"/>
+              </a:defRPr>
+            </a:lvl8pPr>
+            <a:lvl9pPr marL="3886200" indent="-228600" defTabSz="457200" eaLnBrk="0" fontAlgn="base" hangingPunct="0">
+              <a:spcBef>
+                <a:spcPts val="600"/>
+              </a:spcBef>
+              <a:spcAft>
+                <a:spcPct val="0"/>
+              </a:spcAft>
+              <a:buClr>
+                <a:schemeClr val="accent1"/>
+              </a:buClr>
+              <a:buSzPct val="100000"/>
+              <a:buFont typeface="Wingdings 2" panose="05020102010507070707" pitchFamily="18" charset="2"/>
+              <a:buChar char="¡"/>
+              <a:defRPr>
+                <a:solidFill>
+                  <a:schemeClr val="tx2"/>
+                </a:solidFill>
+                <a:latin typeface="Arial" panose="020B0604020202020204" pitchFamily="34" charset="0"/>
+                <a:ea typeface="ＭＳ Ｐゴシック" panose="020B0600070205080204" pitchFamily="34" charset="-128"/>
+              </a:defRPr>
+            </a:lvl9pPr>
+          </a:lstStyle>
+          <a:p>
+            <a:pPr eaLnBrk="1" hangingPunct="1">
+              <a:spcBef>
+                <a:spcPct val="0"/>
+              </a:spcBef>
+              <a:spcAft>
+                <a:spcPts val="1200"/>
+              </a:spcAft>
+              <a:buClrTx/>
+              <a:buSzTx/>
+              <a:buFontTx/>
+              <a:buNone/>
+              <a:defRPr/>
+            </a:pPr>
+            <a:r>
+              <a:rPr lang="en-US" altLang="en-US" sz="1200" dirty="0">
+                <a:solidFill>
+                  <a:srgbClr val="000000"/>
+                </a:solidFill>
+              </a:rPr>
+              <a:t>data </a:t>
+            </a:r>
+            <a:r>
+              <a:rPr lang="en-US" altLang="en-US" sz="1200" dirty="0" err="1">
+                <a:solidFill>
+                  <a:srgbClr val="000000"/>
+                </a:solidFill>
+              </a:rPr>
+              <a:t>poisson</a:t>
+            </a:r>
+            <a:r>
+              <a:rPr lang="en-US" altLang="en-US" sz="1200" dirty="0">
+                <a:solidFill>
+                  <a:srgbClr val="000000"/>
+                </a:solidFill>
+              </a:rPr>
+              <a:t>;</a:t>
+            </a:r>
+          </a:p>
+          <a:p>
+            <a:pPr eaLnBrk="1" hangingPunct="1">
+              <a:spcBef>
+                <a:spcPct val="0"/>
+              </a:spcBef>
+              <a:spcAft>
+                <a:spcPts val="1200"/>
+              </a:spcAft>
+              <a:buClrTx/>
+              <a:buSzTx/>
+              <a:buFontTx/>
+              <a:buNone/>
+              <a:defRPr/>
+            </a:pPr>
+            <a:r>
+              <a:rPr lang="en-US" altLang="en-US" sz="1200" dirty="0">
+                <a:solidFill>
+                  <a:srgbClr val="000000"/>
+                </a:solidFill>
+              </a:rPr>
+              <a:t>    prob = pdf('POISSON’, 0, 2.1)+ pdf('POISSON’, 1, 2.1)+ pdf('POISSON’, 2, 2.1);</a:t>
+            </a:r>
+          </a:p>
+          <a:p>
+            <a:pPr eaLnBrk="1" hangingPunct="1">
+              <a:spcBef>
+                <a:spcPct val="0"/>
+              </a:spcBef>
+              <a:spcAft>
+                <a:spcPts val="1200"/>
+              </a:spcAft>
+              <a:buClrTx/>
+              <a:buSzTx/>
+              <a:buFontTx/>
+              <a:buNone/>
+              <a:defRPr/>
+            </a:pPr>
+            <a:r>
+              <a:rPr lang="en-US" altLang="en-US" sz="1200" dirty="0">
+                <a:solidFill>
+                  <a:srgbClr val="000000"/>
+                </a:solidFill>
+              </a:rPr>
+              <a:t>    proc print;</a:t>
+            </a:r>
+          </a:p>
+          <a:p>
+            <a:pPr eaLnBrk="1" hangingPunct="1">
+              <a:spcBef>
+                <a:spcPct val="0"/>
+              </a:spcBef>
+              <a:spcAft>
+                <a:spcPts val="1200"/>
+              </a:spcAft>
+              <a:buClrTx/>
+              <a:buSzTx/>
+              <a:buFontTx/>
+              <a:buNone/>
+              <a:defRPr/>
+            </a:pPr>
+            <a:r>
+              <a:rPr lang="en-US" altLang="en-US" sz="1200" dirty="0">
                 <a:solidFill>
                   <a:srgbClr val="000000"/>
                 </a:solidFill>
@@ -36563,6 +37623,59 @@
                       </p:childTnLst>
                     </p:cTn>
                   </p:par>
+                  <p:par>
+                    <p:cTn id="29" fill="hold">
+                      <p:stCondLst>
+                        <p:cond delay="indefinite"/>
+                      </p:stCondLst>
+                      <p:childTnLst>
+                        <p:par>
+                          <p:cTn id="30" fill="hold">
+                            <p:stCondLst>
+                              <p:cond delay="0"/>
+                            </p:stCondLst>
+                            <p:childTnLst>
+                              <p:par>
+                                <p:cTn id="31" presetID="10" presetClass="entr" presetSubtype="0" fill="hold" grpId="0" nodeType="clickEffect">
+                                  <p:stCondLst>
+                                    <p:cond delay="0"/>
+                                  </p:stCondLst>
+                                  <p:childTnLst>
+                                    <p:set>
+                                      <p:cBhvr>
+                                        <p:cTn id="32" dur="1" fill="hold">
+                                          <p:stCondLst>
+                                            <p:cond delay="0"/>
+                                          </p:stCondLst>
+                                        </p:cTn>
+                                        <p:tgtEl>
+                                          <p:spTgt spid="4"/>
+                                        </p:tgtEl>
+                                        <p:attrNameLst>
+                                          <p:attrName>style.visibility</p:attrName>
+                                        </p:attrNameLst>
+                                      </p:cBhvr>
+                                      <p:to>
+                                        <p:strVal val="visible"/>
+                                      </p:to>
+                                    </p:set>
+                                    <p:animEffect transition="in" filter="fade">
+                                      <p:cBhvr>
+                                        <p:cTn id="33" dur="500"/>
+                                        <p:tgtEl>
+                                          <p:spTgt spid="4"/>
+                                        </p:tgtEl>
+                                      </p:cBhvr>
+                                    </p:animEffect>
+                                  </p:childTnLst>
+                                </p:cTn>
+                              </p:par>
+                            </p:childTnLst>
+                          </p:cTn>
+                        </p:par>
+                      </p:childTnLst>
+                    </p:cTn>
+                  </p:par>
                 </p:childTnLst>
               </p:cTn>
               <p:prevCondLst>
@@ -36589,6 +37702,7 @@
       <p:bldP spid="3" grpId="0" animBg="1"/>
       <p:bldP spid="10" grpId="0" animBg="1"/>
       <p:bldP spid="2" grpId="0" animBg="1"/>
+      <p:bldP spid="4" grpId="0" animBg="1"/>
     </p:bldLst>
   </p:timing>
 </p:sld>
@@ -37014,7 +38128,51 @@
                 <a:ea typeface="ＭＳ Ｐゴシック" pitchFamily="34" charset="-128"/>
                 <a:cs typeface="+mn-cs"/>
               </a:rPr>
-              <a:t>5.2 The Sampling Distribution of a Sample Mean</a:t>
+              <a:t>5.2 Sampling Distribution </a:t>
+            </a:r>
+            <a:r>
+              <a:rPr lang="en-US" altLang="en-US" sz="2800" b="1">
+                <a:solidFill>
+                  <a:srgbClr val="073779"/>
+                </a:solidFill>
+                <a:latin typeface="Arial" pitchFamily="34" charset="0"/>
+                <a:ea typeface="ＭＳ Ｐゴシック" pitchFamily="34" charset="-128"/>
+                <a:cs typeface="+mn-cs"/>
+              </a:rPr>
+              <a:t>of </a:t>
+            </a:r>
+            <a:r>
+              <a:rPr lang="en-US" altLang="zh-CN" sz="2800" b="1">
+                <a:solidFill>
+                  <a:srgbClr val="073779"/>
+                </a:solidFill>
+                <a:latin typeface="Arial" pitchFamily="34" charset="0"/>
+                <a:ea typeface="ＭＳ Ｐゴシック" pitchFamily="34" charset="-128"/>
+                <a:cs typeface="+mn-cs"/>
+              </a:rPr>
+              <a:t>the</a:t>
+            </a:r>
+            <a:r>
+              <a:rPr lang="en-US" altLang="en-US" sz="2800" b="1">
+                <a:solidFill>
+                  <a:srgbClr val="073779"/>
+                </a:solidFill>
+                <a:latin typeface="Arial" pitchFamily="34" charset="0"/>
+                <a:ea typeface="ＭＳ Ｐゴシック" pitchFamily="34" charset="-128"/>
+                <a:cs typeface="+mn-cs"/>
+              </a:rPr>
+              <a:t> </a:t>
+            </a:r>
+            <a:r>
+              <a:rPr lang="en-US" altLang="en-US" sz="2800" b="1" dirty="0">
+                <a:solidFill>
+                  <a:srgbClr val="073779"/>
+                </a:solidFill>
+                <a:latin typeface="Arial" pitchFamily="34" charset="0"/>
+                <a:ea typeface="ＭＳ Ｐゴシック" pitchFamily="34" charset="-128"/>
+                <a:cs typeface="+mn-cs"/>
+              </a:rPr>
+              <a:t>Sample Mean</a:t>
             </a:r>
           </a:p>
           <a:p>
